--- a/sincronizacion-4-slides.pptx
+++ b/sincronizacion-4-slides.pptx
@@ -4,15 +4,15 @@
   <p:sldMasterIdLst>
     <p:sldMasterId id="2147483648" r:id="rId1"/>
   </p:sldMasterIdLst>
+  <p:notesMasterIdLst>
+    <p:notesMasterId r:id="rId6"/>
+  </p:notesMasterIdLst>
   <p:sldIdLst>
     <p:sldId id="256" r:id="rId2"/>
     <p:sldId id="257" r:id="rId3"/>
     <p:sldId id="258" r:id="rId4"/>
     <p:sldId id="259" r:id="rId5"/>
   </p:sldIdLst>
-  <p:notesMasterIdLst>
-    <p:notesMasterId r:id="rId6"/>
-  </p:notesMasterIdLst>
   <p:sldSz cx="12192000" cy="6858000"/>
   <p:notesSz cx="6858000" cy="12192000"/>
   <p:defaultTextStyle>
@@ -107,6 +107,11 @@
       </a:defRPr>
     </a:lvl9pPr>
   </p:defaultTextStyle>
+  <p:extLst>
+    <p:ext uri="{EFAFB233-063F-42B5-8137-9DF3F51BA10A}">
+      <p15:sldGuideLst xmlns:p15="http://schemas.microsoft.com/office/powerpoint/2012/main"/>
+    </p:ext>
+  </p:extLst>
 </p:presentation>
 </file>
 
@@ -132,234 +137,10 @@
           <a:chExt cx="0" cy="0"/>
         </a:xfrm>
       </p:grpSpPr>
-      <p:sp>
-        <p:nvSpPr>
-          <p:cNvPr id="2" name="Header Placeholder 1"/>
-          <p:cNvSpPr>
-            <a:spLocks noGrp="1"/>
-          </p:cNvSpPr>
-          <p:nvPr>
-            <p:ph type="hdr" sz="quarter"/>
-          </p:nvPr>
-        </p:nvSpPr>
-        <p:spPr>
-          <a:xfrm>
-            <a:off x="0" y="0"/>
-            <a:ext cx="2971800" cy="458788"/>
-          </a:xfrm>
-          <a:prstGeom prst="rect">
-            <a:avLst/>
-          </a:prstGeom>
-        </p:spPr>
-        <p:txBody>
-          <a:bodyPr vert="horz" lIns="91440" tIns="45720" rIns="91440" bIns="45720" rtlCol="0"/>
-          <a:lstStyle>
-            <a:lvl1pPr algn="l">
-              <a:defRPr sz="1200"/>
-            </a:lvl1pPr>
-          </a:lstStyle>
-          <a:p>
-            <a:endParaRPr lang="en-US"/>
-          </a:p>
-        </p:txBody>
-      </p:sp>
-      <p:sp>
-        <p:nvSpPr>
-          <p:cNvPr id="3" name="Date Placeholder 2"/>
-          <p:cNvSpPr>
-            <a:spLocks noGrp="1"/>
-          </p:cNvSpPr>
-          <p:nvPr>
-            <p:ph type="dt" idx="1"/>
-          </p:nvPr>
-        </p:nvSpPr>
-        <p:spPr>
-          <a:xfrm>
-            <a:off x="3884613" y="0"/>
-            <a:ext cx="2971800" cy="458788"/>
-          </a:xfrm>
-          <a:prstGeom prst="rect">
-            <a:avLst/>
-          </a:prstGeom>
-        </p:spPr>
-        <p:txBody>
-          <a:bodyPr vert="horz" lIns="91440" tIns="45720" rIns="91440" bIns="45720" rtlCol="0"/>
-          <a:lstStyle>
-            <a:lvl1pPr algn="r">
-              <a:defRPr sz="1200"/>
-            </a:lvl1pPr>
-          </a:lstStyle>
-          <a:p>
-            <a:fld id="{5282F153-3F37-0F45-9E97-73ACFA13230C}" type="datetimeFigureOut">
-              <a:rPr lang="en-US"/>
-              <a:t>7/23/19</a:t>
-            </a:fld>
-            <a:endParaRPr lang="en-US"/>
-          </a:p>
-        </p:txBody>
-      </p:sp>
-      <p:sp>
-        <p:nvSpPr>
-          <p:cNvPr id="4" name="Slide Image Placeholder 3"/>
-          <p:cNvSpPr>
-            <a:spLocks noGrp="1" noRot="1" noChangeAspect="1"/>
-          </p:cNvSpPr>
-          <p:nvPr>
-            <p:ph type="sldImg" idx="2"/>
-          </p:nvPr>
-        </p:nvSpPr>
-        <p:spPr>
-          <a:xfrm>
-            <a:off x="685800" y="1143000"/>
-            <a:ext cx="5486400" cy="3086100"/>
-          </a:xfrm>
-          <a:prstGeom prst="rect">
-            <a:avLst/>
-          </a:prstGeom>
-          <a:noFill/>
-          <a:ln w="12700">
-            <a:solidFill>
-              <a:prstClr val="black"/>
-            </a:solidFill>
-          </a:ln>
-        </p:spPr>
-        <p:txBody>
-          <a:bodyPr vert="horz" lIns="91440" tIns="45720" rIns="91440" bIns="45720" rtlCol="0" anchor="ctr"/>
-          <a:lstStyle/>
-          <a:p>
-            <a:endParaRPr lang="en-US"/>
-          </a:p>
-        </p:txBody>
-      </p:sp>
-      <p:sp>
-        <p:nvSpPr>
-          <p:cNvPr id="5" name="Notes Placeholder 4"/>
-          <p:cNvSpPr>
-            <a:spLocks noGrp="1"/>
-          </p:cNvSpPr>
-          <p:nvPr>
-            <p:ph type="body" sz="quarter" idx="3"/>
-          </p:nvPr>
-        </p:nvSpPr>
-        <p:spPr>
-          <a:xfrm>
-            <a:off x="685800" y="4400550"/>
-            <a:ext cx="5486400" cy="3600450"/>
-          </a:xfrm>
-          <a:prstGeom prst="rect">
-            <a:avLst/>
-          </a:prstGeom>
-        </p:spPr>
-        <p:txBody>
-          <a:bodyPr vert="horz" lIns="91440" tIns="45720" rIns="91440" bIns="45720" rtlCol="0"/>
-          <a:lstStyle/>
-          <a:p>
-            <a:pPr lvl="0"/>
-            <a:r>
-              <a:rPr lang="en-US"/>
-              <a:t>Click to edit Master text styles</a:t>
-            </a:r>
-          </a:p>
-          <a:p>
-            <a:pPr lvl="1"/>
-            <a:r>
-              <a:rPr lang="en-US"/>
-              <a:t>Second level</a:t>
-            </a:r>
-          </a:p>
-          <a:p>
-            <a:pPr lvl="2"/>
-            <a:r>
-              <a:rPr lang="en-US"/>
-              <a:t>Third level</a:t>
-            </a:r>
-          </a:p>
-          <a:p>
-            <a:pPr lvl="3"/>
-            <a:r>
-              <a:rPr lang="en-US"/>
-              <a:t>Fourth level</a:t>
-            </a:r>
-          </a:p>
-          <a:p>
-            <a:pPr lvl="4"/>
-            <a:r>
-              <a:rPr lang="en-US"/>
-              <a:t>Fifth level</a:t>
-            </a:r>
-          </a:p>
-        </p:txBody>
-      </p:sp>
-      <p:sp>
-        <p:nvSpPr>
-          <p:cNvPr id="6" name="Footer Placeholder 5"/>
-          <p:cNvSpPr>
-            <a:spLocks noGrp="1"/>
-          </p:cNvSpPr>
-          <p:nvPr>
-            <p:ph type="ftr" sz="quarter" idx="4"/>
-          </p:nvPr>
-        </p:nvSpPr>
-        <p:spPr>
-          <a:xfrm>
-            <a:off x="0" y="8685213"/>
-            <a:ext cx="2971800" cy="458787"/>
-          </a:xfrm>
-          <a:prstGeom prst="rect">
-            <a:avLst/>
-          </a:prstGeom>
-        </p:spPr>
-        <p:txBody>
-          <a:bodyPr vert="horz" lIns="91440" tIns="45720" rIns="91440" bIns="45720" rtlCol="0" anchor="b"/>
-          <a:lstStyle>
-            <a:lvl1pPr algn="l">
-              <a:defRPr sz="1200"/>
-            </a:lvl1pPr>
-          </a:lstStyle>
-          <a:p>
-            <a:endParaRPr lang="en-US"/>
-          </a:p>
-        </p:txBody>
-      </p:sp>
-      <p:sp>
-        <p:nvSpPr>
-          <p:cNvPr id="7" name="Slide Number Placeholder 6"/>
-          <p:cNvSpPr>
-            <a:spLocks noGrp="1"/>
-          </p:cNvSpPr>
-          <p:nvPr>
-            <p:ph type="sldNum" sz="quarter" idx="5"/>
-          </p:nvPr>
-        </p:nvSpPr>
-        <p:spPr>
-          <a:xfrm>
-            <a:off x="3884613" y="8685213"/>
-            <a:ext cx="2971800" cy="458787"/>
-          </a:xfrm>
-          <a:prstGeom prst="rect">
-            <a:avLst/>
-          </a:prstGeom>
-        </p:spPr>
-        <p:txBody>
-          <a:bodyPr vert="horz" lIns="91440" tIns="45720" rIns="91440" bIns="45720" rtlCol="0" anchor="b"/>
-          <a:lstStyle>
-            <a:lvl1pPr algn="r">
-              <a:defRPr sz="1200"/>
-            </a:lvl1pPr>
-          </a:lstStyle>
-          <a:p>
-            <a:fld id="{CE5E9CC1-C706-0F49-92D6-E571CC5EEA8F}" type="slidenum">
-              <a:rPr lang="en-US"/>
-              <a:t>‹#›</a:t>
-            </a:fld>
-            <a:endParaRPr lang="en-US"/>
-          </a:p>
-        </p:txBody>
-      </p:sp>
     </p:spTree>
     <p:extLst>
       <p:ext uri="{BB962C8B-B14F-4D97-AF65-F5344CB8AC3E}">
-        <p14:creationId xmlns:p14="http://schemas.microsoft.com/office/powerpoint/2010/main" val="1024086991"/>
+        <p14:creationId xmlns:p14="http://schemas.microsoft.com/office/powerpoint/2010/main" val="1098178068"/>
       </p:ext>
     </p:extLst>
   </p:cSld>
@@ -503,10 +284,6 @@
           <a:bodyPr/>
           <a:lstStyle/>
           <a:p>
-            <a:r>
-              <a:rPr lang="en-US" dirty="0"/>
-              <a:t/>
-            </a:r>
             <a:endParaRPr lang="en-US" dirty="0"/>
           </a:p>
         </p:txBody>
@@ -591,10 +368,6 @@
           <a:bodyPr/>
           <a:lstStyle/>
           <a:p>
-            <a:r>
-              <a:rPr lang="en-US" dirty="0"/>
-              <a:t/>
-            </a:r>
             <a:endParaRPr lang="en-US" dirty="0"/>
           </a:p>
         </p:txBody>
@@ -679,10 +452,6 @@
           <a:bodyPr/>
           <a:lstStyle/>
           <a:p>
-            <a:r>
-              <a:rPr lang="en-US" dirty="0"/>
-              <a:t/>
-            </a:r>
             <a:endParaRPr lang="en-US" dirty="0"/>
           </a:p>
         </p:txBody>
@@ -767,10 +536,6 @@
           <a:bodyPr/>
           <a:lstStyle/>
           <a:p>
-            <a:r>
-              <a:rPr lang="en-US" dirty="0"/>
-              <a:t/>
-            </a:r>
             <a:endParaRPr lang="en-US" dirty="0"/>
           </a:p>
         </p:txBody>
@@ -844,6 +609,11 @@
 <file path=ppt/slideMasters/slideMaster1.xml><?xml version="1.0" encoding="utf-8"?>
 <p:sldMaster xmlns:a="http://schemas.openxmlformats.org/drawingml/2006/main" xmlns:r="http://schemas.openxmlformats.org/officeDocument/2006/relationships" xmlns:p="http://schemas.openxmlformats.org/presentationml/2006/main">
   <p:cSld>
+    <p:bg>
+      <p:bgRef idx="1001">
+        <a:schemeClr val="bg1"/>
+      </p:bgRef>
+    </p:bg>
     <p:spTree>
       <p:nvGrpSpPr>
         <p:cNvPr id="1" name=""/>
@@ -1126,6 +896,7 @@
         <a:solidFill>
           <a:srgbClr val="F4F7FB"/>
         </a:solidFill>
+        <a:effectLst/>
       </p:bgPr>
     </p:bg>
     <p:spTree>
@@ -1163,11 +934,11 @@
           <a:bodyPr wrap="square" rtlCol="0" anchor="ctr"/>
           <a:lstStyle/>
           <a:p>
-            <a:pPr indent="0" marL="0">
+            <a:pPr marL="0" indent="0">
               <a:buNone/>
             </a:pPr>
             <a:r>
-              <a:rPr lang="en-US" sz="1200" b="1" spc="200" kern="0" dirty="0">
+              <a:rPr lang="en-US" sz="1200" b="1" kern="0" spc="200" dirty="0">
                 <a:solidFill>
                   <a:srgbClr val="3D8DFF"/>
                 </a:solidFill>
@@ -1202,7 +973,7 @@
           <a:bodyPr wrap="square" rtlCol="0" anchor="ctr"/>
           <a:lstStyle/>
           <a:p>
-            <a:pPr indent="0" marL="0">
+            <a:pPr marL="0" indent="0">
               <a:buNone/>
             </a:pPr>
             <a:r>
@@ -1241,7 +1012,7 @@
           <a:bodyPr wrap="square" rtlCol="0" anchor="ctr"/>
           <a:lstStyle/>
           <a:p>
-            <a:pPr indent="0" marL="0">
+            <a:pPr marL="0" indent="0">
               <a:buNone/>
             </a:pPr>
             <a:r>
@@ -1285,13 +1056,20 @@
             <a:prstDash val="solid"/>
           </a:ln>
           <a:effectLst>
-            <a:outerShdw sx="100000" sy="100000" kx="0" ky="0" algn="bl" rotWithShape="0" blurRad="101600" dist="38100" dir="5400000">
+            <a:outerShdw blurRad="101600" dist="38100" dir="5400000" algn="bl" rotWithShape="0">
               <a:srgbClr val="1B2733">
                 <a:alpha val="12000"/>
               </a:srgbClr>
             </a:outerShdw>
           </a:effectLst>
         </p:spPr>
+        <p:txBody>
+          <a:bodyPr/>
+          <a:lstStyle/>
+          <a:p>
+            <a:endParaRPr lang="es-CO"/>
+          </a:p>
+        </p:txBody>
       </p:sp>
       <p:sp>
         <p:nvSpPr>
@@ -1312,6 +1090,13 @@
           </a:solidFill>
           <a:ln/>
         </p:spPr>
+        <p:txBody>
+          <a:bodyPr/>
+          <a:lstStyle/>
+          <a:p>
+            <a:endParaRPr lang="es-CO"/>
+          </a:p>
+        </p:txBody>
       </p:sp>
       <p:sp>
         <p:nvSpPr>
@@ -1334,7 +1119,7 @@
           <a:bodyPr wrap="square" lIns="0" tIns="0" rIns="0" bIns="0" rtlCol="0" anchor="ctr"/>
           <a:lstStyle/>
           <a:p>
-            <a:pPr algn="ctr" indent="0" marL="0">
+            <a:pPr marL="0" indent="0" algn="ctr">
               <a:buNone/>
             </a:pPr>
             <a:r>
@@ -1373,7 +1158,7 @@
           <a:bodyPr wrap="square" lIns="0" tIns="0" rIns="0" bIns="0" rtlCol="0" anchor="ctr"/>
           <a:lstStyle/>
           <a:p>
-            <a:pPr indent="0" marL="0">
+            <a:pPr marL="0" indent="0">
               <a:buNone/>
             </a:pPr>
             <a:r>
@@ -1412,7 +1197,7 @@
           <a:bodyPr wrap="square" lIns="0" tIns="0" rIns="0" bIns="0" rtlCol="0" anchor="ctr"/>
           <a:lstStyle/>
           <a:p>
-            <a:pPr indent="0" marL="0">
+            <a:pPr marL="0" indent="0">
               <a:lnSpc>
                 <a:spcPct val="115000"/>
               </a:lnSpc>
@@ -1459,13 +1244,20 @@
             <a:prstDash val="solid"/>
           </a:ln>
           <a:effectLst>
-            <a:outerShdw sx="100000" sy="100000" kx="0" ky="0" algn="bl" rotWithShape="0" blurRad="101600" dist="38100" dir="5400000">
+            <a:outerShdw blurRad="101600" dist="38100" dir="5400000" algn="bl" rotWithShape="0">
               <a:srgbClr val="1B2733">
                 <a:alpha val="12000"/>
               </a:srgbClr>
             </a:outerShdw>
           </a:effectLst>
         </p:spPr>
+        <p:txBody>
+          <a:bodyPr/>
+          <a:lstStyle/>
+          <a:p>
+            <a:endParaRPr lang="es-CO"/>
+          </a:p>
+        </p:txBody>
       </p:sp>
       <p:sp>
         <p:nvSpPr>
@@ -1486,6 +1278,13 @@
           </a:solidFill>
           <a:ln/>
         </p:spPr>
+        <p:txBody>
+          <a:bodyPr/>
+          <a:lstStyle/>
+          <a:p>
+            <a:endParaRPr lang="es-CO"/>
+          </a:p>
+        </p:txBody>
       </p:sp>
       <p:sp>
         <p:nvSpPr>
@@ -1508,7 +1307,7 @@
           <a:bodyPr wrap="square" lIns="0" tIns="0" rIns="0" bIns="0" rtlCol="0" anchor="ctr"/>
           <a:lstStyle/>
           <a:p>
-            <a:pPr algn="ctr" indent="0" marL="0">
+            <a:pPr marL="0" indent="0" algn="ctr">
               <a:buNone/>
             </a:pPr>
             <a:r>
@@ -1547,7 +1346,7 @@
           <a:bodyPr wrap="square" lIns="0" tIns="0" rIns="0" bIns="0" rtlCol="0" anchor="ctr"/>
           <a:lstStyle/>
           <a:p>
-            <a:pPr indent="0" marL="0">
+            <a:pPr marL="0" indent="0">
               <a:buNone/>
             </a:pPr>
             <a:r>
@@ -1586,7 +1385,7 @@
           <a:bodyPr wrap="square" lIns="0" tIns="0" rIns="0" bIns="0" rtlCol="0" anchor="ctr"/>
           <a:lstStyle/>
           <a:p>
-            <a:pPr indent="0" marL="0">
+            <a:pPr marL="0" indent="0">
               <a:lnSpc>
                 <a:spcPct val="115000"/>
               </a:lnSpc>
@@ -1633,13 +1432,20 @@
             <a:prstDash val="solid"/>
           </a:ln>
           <a:effectLst>
-            <a:outerShdw sx="100000" sy="100000" kx="0" ky="0" algn="bl" rotWithShape="0" blurRad="101600" dist="38100" dir="5400000">
+            <a:outerShdw blurRad="101600" dist="38100" dir="5400000" algn="bl" rotWithShape="0">
               <a:srgbClr val="1B2733">
                 <a:alpha val="12000"/>
               </a:srgbClr>
             </a:outerShdw>
           </a:effectLst>
         </p:spPr>
+        <p:txBody>
+          <a:bodyPr/>
+          <a:lstStyle/>
+          <a:p>
+            <a:endParaRPr lang="es-CO"/>
+          </a:p>
+        </p:txBody>
       </p:sp>
       <p:sp>
         <p:nvSpPr>
@@ -1660,6 +1466,13 @@
           </a:solidFill>
           <a:ln/>
         </p:spPr>
+        <p:txBody>
+          <a:bodyPr/>
+          <a:lstStyle/>
+          <a:p>
+            <a:endParaRPr lang="es-CO"/>
+          </a:p>
+        </p:txBody>
       </p:sp>
       <p:sp>
         <p:nvSpPr>
@@ -1682,7 +1495,7 @@
           <a:bodyPr wrap="square" lIns="0" tIns="0" rIns="0" bIns="0" rtlCol="0" anchor="ctr"/>
           <a:lstStyle/>
           <a:p>
-            <a:pPr algn="ctr" indent="0" marL="0">
+            <a:pPr marL="0" indent="0" algn="ctr">
               <a:buNone/>
             </a:pPr>
             <a:r>
@@ -1721,7 +1534,7 @@
           <a:bodyPr wrap="square" lIns="0" tIns="0" rIns="0" bIns="0" rtlCol="0" anchor="ctr"/>
           <a:lstStyle/>
           <a:p>
-            <a:pPr indent="0" marL="0">
+            <a:pPr marL="0" indent="0">
               <a:buNone/>
             </a:pPr>
             <a:r>
@@ -1760,7 +1573,7 @@
           <a:bodyPr wrap="square" lIns="0" tIns="0" rIns="0" bIns="0" rtlCol="0" anchor="ctr"/>
           <a:lstStyle/>
           <a:p>
-            <a:pPr indent="0" marL="0">
+            <a:pPr marL="0" indent="0">
               <a:lnSpc>
                 <a:spcPct val="115000"/>
               </a:lnSpc>
@@ -1802,6 +1615,13 @@
           </a:solidFill>
           <a:ln/>
         </p:spPr>
+        <p:txBody>
+          <a:bodyPr/>
+          <a:lstStyle/>
+          <a:p>
+            <a:endParaRPr lang="es-CO"/>
+          </a:p>
+        </p:txBody>
       </p:sp>
       <p:sp>
         <p:nvSpPr>
@@ -1824,7 +1644,7 @@
           <a:bodyPr wrap="square" rtlCol="0" anchor="ctr"/>
           <a:lstStyle/>
           <a:p>
-            <a:pPr indent="0" marL="0">
+            <a:pPr marL="0" indent="0">
               <a:lnSpc>
                 <a:spcPct val="120000"/>
               </a:lnSpc>
@@ -1841,12 +1661,6 @@
               </a:rPr>
               <a:t>En el servidor del laboratorio:  </a:t>
             </a:r>
-            <a:pPr indent="0" marL="0">
-              <a:lnSpc>
-                <a:spcPct val="120000"/>
-              </a:lnSpc>
-              <a:buNone/>
-            </a:pPr>
             <a:r>
               <a:rPr lang="en-US" sz="1350" dirty="0">
                 <a:solidFill>
@@ -1883,7 +1697,7 @@
           <a:bodyPr wrap="square" rtlCol="0" anchor="ctr"/>
           <a:lstStyle/>
           <a:p>
-            <a:pPr algn="r" indent="0" marL="0">
+            <a:pPr marL="0" indent="0" algn="r">
               <a:buNone/>
             </a:pPr>
             <a:r>
@@ -1917,6 +1731,7 @@
         <a:solidFill>
           <a:srgbClr val="F4F7FB"/>
         </a:solidFill>
+        <a:effectLst/>
       </p:bgPr>
     </p:bg>
     <p:spTree>
@@ -1954,11 +1769,11 @@
           <a:bodyPr wrap="square" rtlCol="0" anchor="ctr"/>
           <a:lstStyle/>
           <a:p>
-            <a:pPr indent="0" marL="0">
+            <a:pPr marL="0" indent="0">
               <a:buNone/>
             </a:pPr>
             <a:r>
-              <a:rPr lang="en-US" sz="1200" b="1" spc="200" kern="0" dirty="0">
+              <a:rPr lang="en-US" sz="1200" b="1" kern="0" spc="200" dirty="0">
                 <a:solidFill>
                   <a:srgbClr val="3D8DFF"/>
                 </a:solidFill>
@@ -1993,7 +1808,7 @@
           <a:bodyPr wrap="square" rtlCol="0" anchor="ctr"/>
           <a:lstStyle/>
           <a:p>
-            <a:pPr indent="0" marL="0">
+            <a:pPr marL="0" indent="0">
               <a:buNone/>
             </a:pPr>
             <a:r>
@@ -2032,7 +1847,7 @@
           <a:bodyPr wrap="square" rtlCol="0" anchor="ctr"/>
           <a:lstStyle/>
           <a:p>
-            <a:pPr indent="0" marL="0">
+            <a:pPr marL="0" indent="0">
               <a:buNone/>
             </a:pPr>
             <a:r>
@@ -2076,13 +1891,20 @@
             <a:prstDash val="solid"/>
           </a:ln>
           <a:effectLst>
-            <a:outerShdw sx="100000" sy="100000" kx="0" ky="0" algn="bl" rotWithShape="0" blurRad="101600" dist="38100" dir="5400000">
+            <a:outerShdw blurRad="101600" dist="38100" dir="5400000" algn="bl" rotWithShape="0">
               <a:srgbClr val="1B2733">
                 <a:alpha val="10000"/>
               </a:srgbClr>
             </a:outerShdw>
           </a:effectLst>
         </p:spPr>
+        <p:txBody>
+          <a:bodyPr/>
+          <a:lstStyle/>
+          <a:p>
+            <a:endParaRPr lang="es-CO"/>
+          </a:p>
+        </p:txBody>
       </p:sp>
       <p:sp>
         <p:nvSpPr>
@@ -2105,6 +1927,13 @@
           </a:solidFill>
           <a:ln/>
         </p:spPr>
+        <p:txBody>
+          <a:bodyPr/>
+          <a:lstStyle/>
+          <a:p>
+            <a:endParaRPr lang="es-CO"/>
+          </a:p>
+        </p:txBody>
       </p:sp>
       <p:sp>
         <p:nvSpPr>
@@ -2125,6 +1954,13 @@
           </a:solidFill>
           <a:ln/>
         </p:spPr>
+        <p:txBody>
+          <a:bodyPr/>
+          <a:lstStyle/>
+          <a:p>
+            <a:endParaRPr lang="es-CO"/>
+          </a:p>
+        </p:txBody>
       </p:sp>
       <p:sp>
         <p:nvSpPr>
@@ -2147,7 +1983,7 @@
           <a:bodyPr wrap="square" lIns="0" tIns="0" rIns="0" bIns="0" rtlCol="0" anchor="ctr"/>
           <a:lstStyle/>
           <a:p>
-            <a:pPr indent="0" marL="0">
+            <a:pPr marL="0" indent="0">
               <a:buNone/>
             </a:pPr>
             <a:r>
@@ -2186,7 +2022,7 @@
           <a:bodyPr wrap="square" lIns="0" tIns="0" rIns="0" bIns="0" rtlCol="0" anchor="ctr"/>
           <a:lstStyle/>
           <a:p>
-            <a:pPr indent="0" marL="0">
+            <a:pPr marL="0" indent="0">
               <a:buNone/>
             </a:pPr>
             <a:r>
@@ -2225,7 +2061,7 @@
           <a:bodyPr wrap="square" lIns="0" tIns="0" rIns="0" bIns="0" rtlCol="0" anchor="t"/>
           <a:lstStyle/>
           <a:p>
-            <a:pPr indent="0" marL="0">
+            <a:pPr marL="0" indent="0">
               <a:lnSpc>
                 <a:spcPct val="105000"/>
               </a:lnSpc>
@@ -2243,12 +2079,6 @@
               <a:t>Relojes físicos
 </a:t>
             </a:r>
-            <a:pPr indent="0" marL="0">
-              <a:lnSpc>
-                <a:spcPct val="105000"/>
-              </a:lnSpc>
-              <a:buNone/>
-            </a:pPr>
             <a:r>
               <a:rPr lang="en-US" sz="1150" dirty="0">
                 <a:solidFill>
@@ -2285,7 +2115,7 @@
           <a:bodyPr wrap="square" lIns="0" tIns="0" rIns="0" bIns="0" rtlCol="0" anchor="t"/>
           <a:lstStyle/>
           <a:p>
-            <a:pPr indent="0" marL="0">
+            <a:pPr marL="0" indent="0">
               <a:lnSpc>
                 <a:spcPct val="105000"/>
               </a:lnSpc>
@@ -2303,12 +2133,6 @@
               <a:t>Relojes lógicos
 </a:t>
             </a:r>
-            <a:pPr indent="0" marL="0">
-              <a:lnSpc>
-                <a:spcPct val="105000"/>
-              </a:lnSpc>
-              <a:buNone/>
-            </a:pPr>
             <a:r>
               <a:rPr lang="en-US" sz="1150" dirty="0">
                 <a:solidFill>
@@ -2345,7 +2169,7 @@
           <a:bodyPr wrap="square" lIns="0" tIns="0" rIns="0" bIns="0" rtlCol="0" anchor="t"/>
           <a:lstStyle/>
           <a:p>
-            <a:pPr indent="0" marL="0">
+            <a:pPr marL="0" indent="0">
               <a:lnSpc>
                 <a:spcPct val="105000"/>
               </a:lnSpc>
@@ -2363,12 +2187,6 @@
               <a:t>Exclusión mutua distribuida
 </a:t>
             </a:r>
-            <a:pPr indent="0" marL="0">
-              <a:lnSpc>
-                <a:spcPct val="105000"/>
-              </a:lnSpc>
-              <a:buNone/>
-            </a:pPr>
             <a:r>
               <a:rPr lang="en-US" sz="1150" dirty="0">
                 <a:solidFill>
@@ -2405,7 +2223,7 @@
           <a:bodyPr wrap="square" lIns="0" tIns="0" rIns="0" bIns="0" rtlCol="0" anchor="t"/>
           <a:lstStyle/>
           <a:p>
-            <a:pPr indent="0" marL="0">
+            <a:pPr marL="0" indent="0">
               <a:lnSpc>
                 <a:spcPct val="105000"/>
               </a:lnSpc>
@@ -2423,12 +2241,6 @@
               <a:t>Elección de coordinador
 </a:t>
             </a:r>
-            <a:pPr indent="0" marL="0">
-              <a:lnSpc>
-                <a:spcPct val="105000"/>
-              </a:lnSpc>
-              <a:buNone/>
-            </a:pPr>
             <a:r>
               <a:rPr lang="en-US" sz="1150" dirty="0">
                 <a:solidFill>
@@ -2470,13 +2282,20 @@
             <a:prstDash val="solid"/>
           </a:ln>
           <a:effectLst>
-            <a:outerShdw sx="100000" sy="100000" kx="0" ky="0" algn="bl" rotWithShape="0" blurRad="101600" dist="38100" dir="5400000">
+            <a:outerShdw blurRad="101600" dist="38100" dir="5400000" algn="bl" rotWithShape="0">
               <a:srgbClr val="1B2733">
                 <a:alpha val="10000"/>
               </a:srgbClr>
             </a:outerShdw>
           </a:effectLst>
         </p:spPr>
+        <p:txBody>
+          <a:bodyPr/>
+          <a:lstStyle/>
+          <a:p>
+            <a:endParaRPr lang="es-CO"/>
+          </a:p>
+        </p:txBody>
       </p:sp>
       <p:sp>
         <p:nvSpPr>
@@ -2499,6 +2318,13 @@
           </a:solidFill>
           <a:ln/>
         </p:spPr>
+        <p:txBody>
+          <a:bodyPr/>
+          <a:lstStyle/>
+          <a:p>
+            <a:endParaRPr lang="es-CO"/>
+          </a:p>
+        </p:txBody>
       </p:sp>
       <p:sp>
         <p:nvSpPr>
@@ -2519,6 +2345,13 @@
           </a:solidFill>
           <a:ln/>
         </p:spPr>
+        <p:txBody>
+          <a:bodyPr/>
+          <a:lstStyle/>
+          <a:p>
+            <a:endParaRPr lang="es-CO"/>
+          </a:p>
+        </p:txBody>
       </p:sp>
       <p:sp>
         <p:nvSpPr>
@@ -2541,7 +2374,7 @@
           <a:bodyPr wrap="square" lIns="0" tIns="0" rIns="0" bIns="0" rtlCol="0" anchor="ctr"/>
           <a:lstStyle/>
           <a:p>
-            <a:pPr indent="0" marL="0">
+            <a:pPr marL="0" indent="0">
               <a:buNone/>
             </a:pPr>
             <a:r>
@@ -2580,7 +2413,7 @@
           <a:bodyPr wrap="square" lIns="0" tIns="0" rIns="0" bIns="0" rtlCol="0" anchor="ctr"/>
           <a:lstStyle/>
           <a:p>
-            <a:pPr indent="0" marL="0">
+            <a:pPr marL="0" indent="0">
               <a:buNone/>
             </a:pPr>
             <a:r>
@@ -2619,7 +2452,7 @@
           <a:bodyPr wrap="square" lIns="0" tIns="0" rIns="0" bIns="0" rtlCol="0" anchor="t"/>
           <a:lstStyle/>
           <a:p>
-            <a:pPr indent="0" marL="0">
+            <a:pPr marL="0" indent="0">
               <a:lnSpc>
                 <a:spcPct val="105000"/>
               </a:lnSpc>
@@ -2637,12 +2470,6 @@
               <a:t>Mutex / Lock
 </a:t>
             </a:r>
-            <a:pPr indent="0" marL="0">
-              <a:lnSpc>
-                <a:spcPct val="105000"/>
-              </a:lnSpc>
-              <a:buNone/>
-            </a:pPr>
             <a:r>
               <a:rPr lang="en-US" sz="1150" dirty="0">
                 <a:solidFill>
@@ -2679,7 +2506,7 @@
           <a:bodyPr wrap="square" lIns="0" tIns="0" rIns="0" bIns="0" rtlCol="0" anchor="t"/>
           <a:lstStyle/>
           <a:p>
-            <a:pPr indent="0" marL="0">
+            <a:pPr marL="0" indent="0">
               <a:lnSpc>
                 <a:spcPct val="105000"/>
               </a:lnSpc>
@@ -2697,12 +2524,6 @@
               <a:t>Semáforos
 </a:t>
             </a:r>
-            <a:pPr indent="0" marL="0">
-              <a:lnSpc>
-                <a:spcPct val="105000"/>
-              </a:lnSpc>
-              <a:buNone/>
-            </a:pPr>
             <a:r>
               <a:rPr lang="en-US" sz="1150" dirty="0">
                 <a:solidFill>
@@ -2739,7 +2560,7 @@
           <a:bodyPr wrap="square" lIns="0" tIns="0" rIns="0" bIns="0" rtlCol="0" anchor="t"/>
           <a:lstStyle/>
           <a:p>
-            <a:pPr indent="0" marL="0">
+            <a:pPr marL="0" indent="0">
               <a:lnSpc>
                 <a:spcPct val="105000"/>
               </a:lnSpc>
@@ -2757,12 +2578,6 @@
               <a:t>Monitores y variables de condición
 </a:t>
             </a:r>
-            <a:pPr indent="0" marL="0">
-              <a:lnSpc>
-                <a:spcPct val="105000"/>
-              </a:lnSpc>
-              <a:buNone/>
-            </a:pPr>
             <a:r>
               <a:rPr lang="en-US" sz="1150" dirty="0">
                 <a:solidFill>
@@ -2799,7 +2614,7 @@
           <a:bodyPr wrap="square" lIns="0" tIns="0" rIns="0" bIns="0" rtlCol="0" anchor="t"/>
           <a:lstStyle/>
           <a:p>
-            <a:pPr indent="0" marL="0">
+            <a:pPr marL="0" indent="0">
               <a:lnSpc>
                 <a:spcPct val="105000"/>
               </a:lnSpc>
@@ -2817,12 +2632,6 @@
               <a:t>Atómicos (CAS) y colas bloqueantes
 </a:t>
             </a:r>
-            <a:pPr indent="0" marL="0">
-              <a:lnSpc>
-                <a:spcPct val="105000"/>
-              </a:lnSpc>
-              <a:buNone/>
-            </a:pPr>
             <a:r>
               <a:rPr lang="en-US" sz="1150" dirty="0">
                 <a:solidFill>
@@ -2864,6 +2673,13 @@
             <a:prstDash val="solid"/>
           </a:ln>
         </p:spPr>
+        <p:txBody>
+          <a:bodyPr/>
+          <a:lstStyle/>
+          <a:p>
+            <a:endParaRPr lang="es-CO"/>
+          </a:p>
+        </p:txBody>
       </p:sp>
       <p:sp>
         <p:nvSpPr>
@@ -2886,7 +2702,7 @@
           <a:bodyPr wrap="square" rtlCol="0" anchor="ctr"/>
           <a:lstStyle/>
           <a:p>
-            <a:pPr indent="0" marL="0">
+            <a:pPr marL="0" indent="0">
               <a:buNone/>
             </a:pPr>
             <a:r>
@@ -2900,9 +2716,6 @@
               </a:rPr>
               <a:t>El servidor del laboratorio </a:t>
             </a:r>
-            <a:pPr indent="0" marL="0">
-              <a:buNone/>
-            </a:pPr>
             <a:r>
               <a:rPr lang="en-US" sz="1250" dirty="0">
                 <a:solidFill>
@@ -2939,7 +2752,7 @@
           <a:bodyPr wrap="square" rtlCol="0" anchor="ctr"/>
           <a:lstStyle/>
           <a:p>
-            <a:pPr algn="r" indent="0" marL="0">
+            <a:pPr marL="0" indent="0" algn="r">
               <a:buNone/>
             </a:pPr>
             <a:r>
@@ -2973,6 +2786,7 @@
         <a:solidFill>
           <a:srgbClr val="F4F7FB"/>
         </a:solidFill>
+        <a:effectLst/>
       </p:bgPr>
     </p:bg>
     <p:spTree>
@@ -3010,11 +2824,11 @@
           <a:bodyPr wrap="square" rtlCol="0" anchor="ctr"/>
           <a:lstStyle/>
           <a:p>
-            <a:pPr indent="0" marL="0">
+            <a:pPr marL="0" indent="0">
               <a:buNone/>
             </a:pPr>
             <a:r>
-              <a:rPr lang="en-US" sz="1200" b="1" spc="200" kern="0" dirty="0">
+              <a:rPr lang="en-US" sz="1200" b="1" kern="0" spc="200" dirty="0">
                 <a:solidFill>
                   <a:srgbClr val="3D8DFF"/>
                 </a:solidFill>
@@ -3049,7 +2863,7 @@
           <a:bodyPr wrap="square" rtlCol="0" anchor="ctr"/>
           <a:lstStyle/>
           <a:p>
-            <a:pPr indent="0" marL="0">
+            <a:pPr marL="0" indent="0">
               <a:buNone/>
             </a:pPr>
             <a:r>
@@ -3088,7 +2902,7 @@
           <a:bodyPr wrap="square" rtlCol="0" anchor="ctr"/>
           <a:lstStyle/>
           <a:p>
-            <a:pPr indent="0" marL="0">
+            <a:pPr marL="0" indent="0">
               <a:buNone/>
             </a:pPr>
             <a:r>
@@ -3108,7 +2922,7 @@
       </p:sp>
       <p:graphicFrame>
         <p:nvGraphicFramePr>
-          <p:cNvPr id="4" name="Table 0"/>
+          <p:cNvPr id="5" name="Table 0"/>
           <p:cNvGraphicFramePr>
             <a:graphicFrameLocks noGrp="1"/>
           </p:cNvGraphicFramePr>
@@ -3122,17 +2936,41 @@
         </p:nvGraphicFramePr>
         <p:xfrm>
           <a:off x="548640" y="1691640"/>
-          <a:ext cx="11064240" cy="914400"/>
+          <a:ext cx="11064240" cy="3456432"/>
         </p:xfrm>
         <a:graphic>
           <a:graphicData uri="http://schemas.openxmlformats.org/drawingml/2006/table">
             <a:tbl>
               <a:tblPr/>
               <a:tblGrid>
-                <a:gridCol w="2743200"/>
-                <a:gridCol w="3657600"/>
-                <a:gridCol w="2103120"/>
-                <a:gridCol w="2560320"/>
+                <a:gridCol w="2743200">
+                  <a:extLst>
+                    <a:ext uri="{9D8B030D-6E8A-4147-A177-3AD203B41FA5}">
+                      <a16:colId xmlns:a16="http://schemas.microsoft.com/office/drawing/2014/main" val="20000"/>
+                    </a:ext>
+                  </a:extLst>
+                </a:gridCol>
+                <a:gridCol w="3657600">
+                  <a:extLst>
+                    <a:ext uri="{9D8B030D-6E8A-4147-A177-3AD203B41FA5}">
+                      <a16:colId xmlns:a16="http://schemas.microsoft.com/office/drawing/2014/main" val="20001"/>
+                    </a:ext>
+                  </a:extLst>
+                </a:gridCol>
+                <a:gridCol w="2103120">
+                  <a:extLst>
+                    <a:ext uri="{9D8B030D-6E8A-4147-A177-3AD203B41FA5}">
+                      <a16:colId xmlns:a16="http://schemas.microsoft.com/office/drawing/2014/main" val="20002"/>
+                    </a:ext>
+                  </a:extLst>
+                </a:gridCol>
+                <a:gridCol w="2560320">
+                  <a:extLst>
+                    <a:ext uri="{9D8B030D-6E8A-4147-A177-3AD203B41FA5}">
+                      <a16:colId xmlns:a16="http://schemas.microsoft.com/office/drawing/2014/main" val="20003"/>
+                    </a:ext>
+                  </a:extLst>
+                </a:gridCol>
               </a:tblGrid>
               <a:tr h="384048">
                 <a:tc>
@@ -3140,7 +2978,7 @@
                     <a:bodyPr/>
                     <a:lstStyle/>
                     <a:p>
-                      <a:pPr indent="0" marL="0">
+                      <a:pPr marL="0" indent="0">
                         <a:buNone/>
                       </a:pPr>
                       <a:r>
@@ -3161,7 +2999,7 @@
                       </a:endParaRPr>
                     </a:p>
                   </a:txBody>
-                  <a:tcPr marL="91440" marR="91440" marT="45720" marB="45720" anchor="ctr">
+                  <a:tcPr anchor="ctr">
                     <a:lnL w="9525" cap="flat" cmpd="sng" algn="ctr">
                       <a:solidFill>
                         <a:srgbClr val="DCE4EE"/>
@@ -3208,7 +3046,7 @@
                     <a:bodyPr/>
                     <a:lstStyle/>
                     <a:p>
-                      <a:pPr indent="0" marL="0">
+                      <a:pPr marL="0" indent="0">
                         <a:buNone/>
                       </a:pPr>
                       <a:r>
@@ -3229,7 +3067,7 @@
                       </a:endParaRPr>
                     </a:p>
                   </a:txBody>
-                  <a:tcPr marL="91440" marR="91440" marT="45720" marB="45720" anchor="ctr">
+                  <a:tcPr anchor="ctr">
                     <a:lnL w="9525" cap="flat" cmpd="sng" algn="ctr">
                       <a:solidFill>
                         <a:srgbClr val="DCE4EE"/>
@@ -3276,7 +3114,7 @@
                     <a:bodyPr/>
                     <a:lstStyle/>
                     <a:p>
-                      <a:pPr indent="0" marL="0">
+                      <a:pPr marL="0" indent="0">
                         <a:buNone/>
                       </a:pPr>
                       <a:r>
@@ -3297,7 +3135,7 @@
                       </a:endParaRPr>
                     </a:p>
                   </a:txBody>
-                  <a:tcPr marL="91440" marR="91440" marT="45720" marB="45720" anchor="ctr">
+                  <a:tcPr anchor="ctr">
                     <a:lnL w="9525" cap="flat" cmpd="sng" algn="ctr">
                       <a:solidFill>
                         <a:srgbClr val="DCE4EE"/>
@@ -3344,7 +3182,7 @@
                     <a:bodyPr/>
                     <a:lstStyle/>
                     <a:p>
-                      <a:pPr indent="0" marL="0">
+                      <a:pPr marL="0" indent="0">
                         <a:buNone/>
                       </a:pPr>
                       <a:r>
@@ -3365,7 +3203,7 @@
                       </a:endParaRPr>
                     </a:p>
                   </a:txBody>
-                  <a:tcPr marL="91440" marR="91440" marT="45720" marB="45720" anchor="ctr">
+                  <a:tcPr anchor="ctr">
                     <a:lnL w="9525" cap="flat" cmpd="sng" algn="ctr">
                       <a:solidFill>
                         <a:srgbClr val="DCE4EE"/>
@@ -3407,6 +3245,11 @@
                     </a:solidFill>
                   </a:tcPr>
                 </a:tc>
+                <a:extLst>
+                  <a:ext uri="{0D108BD9-81ED-4DB2-BD59-A6C34878D82A}">
+                    <a16:rowId xmlns:a16="http://schemas.microsoft.com/office/drawing/2014/main" val="10000"/>
+                  </a:ext>
+                </a:extLst>
               </a:tr>
               <a:tr h="384048">
                 <a:tc>
@@ -3414,7 +3257,7 @@
                     <a:bodyPr/>
                     <a:lstStyle/>
                     <a:p>
-                      <a:pPr indent="0" marL="0">
+                      <a:pPr marL="0" indent="0">
                         <a:buNone/>
                       </a:pPr>
                       <a:r>
@@ -3435,7 +3278,7 @@
                       </a:endParaRPr>
                     </a:p>
                   </a:txBody>
-                  <a:tcPr marL="91440" marR="91440" marT="45720" marB="45720" anchor="ctr">
+                  <a:tcPr anchor="ctr">
                     <a:lnL w="9525" cap="flat" cmpd="sng" algn="ctr">
                       <a:solidFill>
                         <a:srgbClr val="DCE4EE"/>
@@ -3482,7 +3325,7 @@
                     <a:bodyPr/>
                     <a:lstStyle/>
                     <a:p>
-                      <a:pPr indent="0" marL="0">
+                      <a:pPr marL="0" indent="0">
                         <a:buNone/>
                       </a:pPr>
                       <a:r>
@@ -3503,7 +3346,7 @@
                       </a:endParaRPr>
                     </a:p>
                   </a:txBody>
-                  <a:tcPr marL="91440" marR="91440" marT="45720" marB="45720" anchor="ctr">
+                  <a:tcPr anchor="ctr">
                     <a:lnL w="9525" cap="flat" cmpd="sng" algn="ctr">
                       <a:solidFill>
                         <a:srgbClr val="DCE4EE"/>
@@ -3550,7 +3393,7 @@
                     <a:bodyPr/>
                     <a:lstStyle/>
                     <a:p>
-                      <a:pPr indent="0" marL="0">
+                      <a:pPr marL="0" indent="0">
                         <a:buNone/>
                       </a:pPr>
                       <a:r>
@@ -3571,7 +3414,7 @@
                       </a:endParaRPr>
                     </a:p>
                   </a:txBody>
-                  <a:tcPr marL="91440" marR="91440" marT="45720" marB="45720" anchor="ctr">
+                  <a:tcPr anchor="ctr">
                     <a:lnL w="9525" cap="flat" cmpd="sng" algn="ctr">
                       <a:solidFill>
                         <a:srgbClr val="DCE4EE"/>
@@ -3618,7 +3461,7 @@
                     <a:bodyPr/>
                     <a:lstStyle/>
                     <a:p>
-                      <a:pPr indent="0" marL="0">
+                      <a:pPr marL="0" indent="0">
                         <a:buNone/>
                       </a:pPr>
                       <a:r>
@@ -3639,7 +3482,7 @@
                       </a:endParaRPr>
                     </a:p>
                   </a:txBody>
-                  <a:tcPr marL="91440" marR="91440" marT="45720" marB="45720" anchor="ctr">
+                  <a:tcPr anchor="ctr">
                     <a:lnL w="9525" cap="flat" cmpd="sng" algn="ctr">
                       <a:solidFill>
                         <a:srgbClr val="DCE4EE"/>
@@ -3681,6 +3524,11 @@
                     </a:solidFill>
                   </a:tcPr>
                 </a:tc>
+                <a:extLst>
+                  <a:ext uri="{0D108BD9-81ED-4DB2-BD59-A6C34878D82A}">
+                    <a16:rowId xmlns:a16="http://schemas.microsoft.com/office/drawing/2014/main" val="10001"/>
+                  </a:ext>
+                </a:extLst>
               </a:tr>
               <a:tr h="384048">
                 <a:tc>
@@ -3688,7 +3536,7 @@
                     <a:bodyPr/>
                     <a:lstStyle/>
                     <a:p>
-                      <a:pPr indent="0" marL="0">
+                      <a:pPr marL="0" indent="0">
                         <a:buNone/>
                       </a:pPr>
                       <a:r>
@@ -3709,7 +3557,7 @@
                       </a:endParaRPr>
                     </a:p>
                   </a:txBody>
-                  <a:tcPr marL="91440" marR="91440" marT="45720" marB="45720" anchor="ctr">
+                  <a:tcPr anchor="ctr">
                     <a:lnL w="9525" cap="flat" cmpd="sng" algn="ctr">
                       <a:solidFill>
                         <a:srgbClr val="DCE4EE"/>
@@ -3756,7 +3604,7 @@
                     <a:bodyPr/>
                     <a:lstStyle/>
                     <a:p>
-                      <a:pPr indent="0" marL="0">
+                      <a:pPr marL="0" indent="0">
                         <a:buNone/>
                       </a:pPr>
                       <a:r>
@@ -3777,7 +3625,7 @@
                       </a:endParaRPr>
                     </a:p>
                   </a:txBody>
-                  <a:tcPr marL="91440" marR="91440" marT="45720" marB="45720" anchor="ctr">
+                  <a:tcPr anchor="ctr">
                     <a:lnL w="9525" cap="flat" cmpd="sng" algn="ctr">
                       <a:solidFill>
                         <a:srgbClr val="DCE4EE"/>
@@ -3824,7 +3672,7 @@
                     <a:bodyPr/>
                     <a:lstStyle/>
                     <a:p>
-                      <a:pPr indent="0" marL="0">
+                      <a:pPr marL="0" indent="0">
                         <a:buNone/>
                       </a:pPr>
                       <a:r>
@@ -3845,7 +3693,7 @@
                       </a:endParaRPr>
                     </a:p>
                   </a:txBody>
-                  <a:tcPr marL="91440" marR="91440" marT="45720" marB="45720" anchor="ctr">
+                  <a:tcPr anchor="ctr">
                     <a:lnL w="9525" cap="flat" cmpd="sng" algn="ctr">
                       <a:solidFill>
                         <a:srgbClr val="DCE4EE"/>
@@ -3892,7 +3740,7 @@
                     <a:bodyPr/>
                     <a:lstStyle/>
                     <a:p>
-                      <a:pPr indent="0" marL="0">
+                      <a:pPr marL="0" indent="0">
                         <a:buNone/>
                       </a:pPr>
                       <a:r>
@@ -3913,7 +3761,7 @@
                       </a:endParaRPr>
                     </a:p>
                   </a:txBody>
-                  <a:tcPr marL="91440" marR="91440" marT="45720" marB="45720" anchor="ctr">
+                  <a:tcPr anchor="ctr">
                     <a:lnL w="9525" cap="flat" cmpd="sng" algn="ctr">
                       <a:solidFill>
                         <a:srgbClr val="DCE4EE"/>
@@ -3955,6 +3803,11 @@
                     </a:solidFill>
                   </a:tcPr>
                 </a:tc>
+                <a:extLst>
+                  <a:ext uri="{0D108BD9-81ED-4DB2-BD59-A6C34878D82A}">
+                    <a16:rowId xmlns:a16="http://schemas.microsoft.com/office/drawing/2014/main" val="10002"/>
+                  </a:ext>
+                </a:extLst>
               </a:tr>
               <a:tr h="384048">
                 <a:tc>
@@ -3962,7 +3815,7 @@
                     <a:bodyPr/>
                     <a:lstStyle/>
                     <a:p>
-                      <a:pPr indent="0" marL="0">
+                      <a:pPr marL="0" indent="0">
                         <a:buNone/>
                       </a:pPr>
                       <a:r>
@@ -3983,7 +3836,7 @@
                       </a:endParaRPr>
                     </a:p>
                   </a:txBody>
-                  <a:tcPr marL="91440" marR="91440" marT="45720" marB="45720" anchor="ctr">
+                  <a:tcPr anchor="ctr">
                     <a:lnL w="9525" cap="flat" cmpd="sng" algn="ctr">
                       <a:solidFill>
                         <a:srgbClr val="DCE4EE"/>
@@ -4030,7 +3883,7 @@
                     <a:bodyPr/>
                     <a:lstStyle/>
                     <a:p>
-                      <a:pPr indent="0" marL="0">
+                      <a:pPr marL="0" indent="0">
                         <a:buNone/>
                       </a:pPr>
                       <a:r>
@@ -4051,7 +3904,7 @@
                       </a:endParaRPr>
                     </a:p>
                   </a:txBody>
-                  <a:tcPr marL="91440" marR="91440" marT="45720" marB="45720" anchor="ctr">
+                  <a:tcPr anchor="ctr">
                     <a:lnL w="9525" cap="flat" cmpd="sng" algn="ctr">
                       <a:solidFill>
                         <a:srgbClr val="DCE4EE"/>
@@ -4098,7 +3951,7 @@
                     <a:bodyPr/>
                     <a:lstStyle/>
                     <a:p>
-                      <a:pPr indent="0" marL="0">
+                      <a:pPr marL="0" indent="0">
                         <a:buNone/>
                       </a:pPr>
                       <a:r>
@@ -4119,7 +3972,7 @@
                       </a:endParaRPr>
                     </a:p>
                   </a:txBody>
-                  <a:tcPr marL="91440" marR="91440" marT="45720" marB="45720" anchor="ctr">
+                  <a:tcPr anchor="ctr">
                     <a:lnL w="9525" cap="flat" cmpd="sng" algn="ctr">
                       <a:solidFill>
                         <a:srgbClr val="DCE4EE"/>
@@ -4166,7 +4019,7 @@
                     <a:bodyPr/>
                     <a:lstStyle/>
                     <a:p>
-                      <a:pPr indent="0" marL="0">
+                      <a:pPr marL="0" indent="0">
                         <a:buNone/>
                       </a:pPr>
                       <a:r>
@@ -4187,7 +4040,7 @@
                       </a:endParaRPr>
                     </a:p>
                   </a:txBody>
-                  <a:tcPr marL="91440" marR="91440" marT="45720" marB="45720" anchor="ctr">
+                  <a:tcPr anchor="ctr">
                     <a:lnL w="9525" cap="flat" cmpd="sng" algn="ctr">
                       <a:solidFill>
                         <a:srgbClr val="DCE4EE"/>
@@ -4229,6 +4082,11 @@
                     </a:solidFill>
                   </a:tcPr>
                 </a:tc>
+                <a:extLst>
+                  <a:ext uri="{0D108BD9-81ED-4DB2-BD59-A6C34878D82A}">
+                    <a16:rowId xmlns:a16="http://schemas.microsoft.com/office/drawing/2014/main" val="10003"/>
+                  </a:ext>
+                </a:extLst>
               </a:tr>
               <a:tr h="384048">
                 <a:tc>
@@ -4236,7 +4094,7 @@
                     <a:bodyPr/>
                     <a:lstStyle/>
                     <a:p>
-                      <a:pPr indent="0" marL="0">
+                      <a:pPr marL="0" indent="0">
                         <a:buNone/>
                       </a:pPr>
                       <a:r>
@@ -4257,7 +4115,7 @@
                       </a:endParaRPr>
                     </a:p>
                   </a:txBody>
-                  <a:tcPr marL="91440" marR="91440" marT="45720" marB="45720" anchor="ctr">
+                  <a:tcPr anchor="ctr">
                     <a:lnL w="9525" cap="flat" cmpd="sng" algn="ctr">
                       <a:solidFill>
                         <a:srgbClr val="DCE4EE"/>
@@ -4304,7 +4162,7 @@
                     <a:bodyPr/>
                     <a:lstStyle/>
                     <a:p>
-                      <a:pPr indent="0" marL="0">
+                      <a:pPr marL="0" indent="0">
                         <a:buNone/>
                       </a:pPr>
                       <a:r>
@@ -4325,7 +4183,7 @@
                       </a:endParaRPr>
                     </a:p>
                   </a:txBody>
-                  <a:tcPr marL="91440" marR="91440" marT="45720" marB="45720" anchor="ctr">
+                  <a:tcPr anchor="ctr">
                     <a:lnL w="9525" cap="flat" cmpd="sng" algn="ctr">
                       <a:solidFill>
                         <a:srgbClr val="DCE4EE"/>
@@ -4372,7 +4230,7 @@
                     <a:bodyPr/>
                     <a:lstStyle/>
                     <a:p>
-                      <a:pPr indent="0" marL="0">
+                      <a:pPr marL="0" indent="0">
                         <a:buNone/>
                       </a:pPr>
                       <a:r>
@@ -4393,7 +4251,7 @@
                       </a:endParaRPr>
                     </a:p>
                   </a:txBody>
-                  <a:tcPr marL="91440" marR="91440" marT="45720" marB="45720" anchor="ctr">
+                  <a:tcPr anchor="ctr">
                     <a:lnL w="9525" cap="flat" cmpd="sng" algn="ctr">
                       <a:solidFill>
                         <a:srgbClr val="DCE4EE"/>
@@ -4440,7 +4298,7 @@
                     <a:bodyPr/>
                     <a:lstStyle/>
                     <a:p>
-                      <a:pPr indent="0" marL="0">
+                      <a:pPr marL="0" indent="0">
                         <a:buNone/>
                       </a:pPr>
                       <a:r>
@@ -4461,7 +4319,7 @@
                       </a:endParaRPr>
                     </a:p>
                   </a:txBody>
-                  <a:tcPr marL="91440" marR="91440" marT="45720" marB="45720" anchor="ctr">
+                  <a:tcPr anchor="ctr">
                     <a:lnL w="9525" cap="flat" cmpd="sng" algn="ctr">
                       <a:solidFill>
                         <a:srgbClr val="DCE4EE"/>
@@ -4503,6 +4361,11 @@
                     </a:solidFill>
                   </a:tcPr>
                 </a:tc>
+                <a:extLst>
+                  <a:ext uri="{0D108BD9-81ED-4DB2-BD59-A6C34878D82A}">
+                    <a16:rowId xmlns:a16="http://schemas.microsoft.com/office/drawing/2014/main" val="10004"/>
+                  </a:ext>
+                </a:extLst>
               </a:tr>
               <a:tr h="384048">
                 <a:tc>
@@ -4510,7 +4373,7 @@
                     <a:bodyPr/>
                     <a:lstStyle/>
                     <a:p>
-                      <a:pPr indent="0" marL="0">
+                      <a:pPr marL="0" indent="0">
                         <a:buNone/>
                       </a:pPr>
                       <a:r>
@@ -4531,7 +4394,7 @@
                       </a:endParaRPr>
                     </a:p>
                   </a:txBody>
-                  <a:tcPr marL="91440" marR="91440" marT="45720" marB="45720" anchor="ctr">
+                  <a:tcPr anchor="ctr">
                     <a:lnL w="9525" cap="flat" cmpd="sng" algn="ctr">
                       <a:solidFill>
                         <a:srgbClr val="DCE4EE"/>
@@ -4578,7 +4441,7 @@
                     <a:bodyPr/>
                     <a:lstStyle/>
                     <a:p>
-                      <a:pPr indent="0" marL="0">
+                      <a:pPr marL="0" indent="0">
                         <a:buNone/>
                       </a:pPr>
                       <a:r>
@@ -4599,7 +4462,7 @@
                       </a:endParaRPr>
                     </a:p>
                   </a:txBody>
-                  <a:tcPr marL="91440" marR="91440" marT="45720" marB="45720" anchor="ctr">
+                  <a:tcPr anchor="ctr">
                     <a:lnL w="9525" cap="flat" cmpd="sng" algn="ctr">
                       <a:solidFill>
                         <a:srgbClr val="DCE4EE"/>
@@ -4646,7 +4509,7 @@
                     <a:bodyPr/>
                     <a:lstStyle/>
                     <a:p>
-                      <a:pPr indent="0" marL="0">
+                      <a:pPr marL="0" indent="0">
                         <a:buNone/>
                       </a:pPr>
                       <a:r>
@@ -4667,7 +4530,7 @@
                       </a:endParaRPr>
                     </a:p>
                   </a:txBody>
-                  <a:tcPr marL="91440" marR="91440" marT="45720" marB="45720" anchor="ctr">
+                  <a:tcPr anchor="ctr">
                     <a:lnL w="9525" cap="flat" cmpd="sng" algn="ctr">
                       <a:solidFill>
                         <a:srgbClr val="DCE4EE"/>
@@ -4714,7 +4577,7 @@
                     <a:bodyPr/>
                     <a:lstStyle/>
                     <a:p>
-                      <a:pPr indent="0" marL="0">
+                      <a:pPr marL="0" indent="0">
                         <a:buNone/>
                       </a:pPr>
                       <a:r>
@@ -4735,7 +4598,7 @@
                       </a:endParaRPr>
                     </a:p>
                   </a:txBody>
-                  <a:tcPr marL="91440" marR="91440" marT="45720" marB="45720" anchor="ctr">
+                  <a:tcPr anchor="ctr">
                     <a:lnL w="9525" cap="flat" cmpd="sng" algn="ctr">
                       <a:solidFill>
                         <a:srgbClr val="DCE4EE"/>
@@ -4777,6 +4640,11 @@
                     </a:solidFill>
                   </a:tcPr>
                 </a:tc>
+                <a:extLst>
+                  <a:ext uri="{0D108BD9-81ED-4DB2-BD59-A6C34878D82A}">
+                    <a16:rowId xmlns:a16="http://schemas.microsoft.com/office/drawing/2014/main" val="10005"/>
+                  </a:ext>
+                </a:extLst>
               </a:tr>
               <a:tr h="384048">
                 <a:tc>
@@ -4784,7 +4652,7 @@
                     <a:bodyPr/>
                     <a:lstStyle/>
                     <a:p>
-                      <a:pPr indent="0" marL="0">
+                      <a:pPr marL="0" indent="0">
                         <a:buNone/>
                       </a:pPr>
                       <a:r>
@@ -4805,7 +4673,7 @@
                       </a:endParaRPr>
                     </a:p>
                   </a:txBody>
-                  <a:tcPr marL="91440" marR="91440" marT="45720" marB="45720" anchor="ctr">
+                  <a:tcPr anchor="ctr">
                     <a:lnL w="9525" cap="flat" cmpd="sng" algn="ctr">
                       <a:solidFill>
                         <a:srgbClr val="DCE4EE"/>
@@ -4852,7 +4720,7 @@
                     <a:bodyPr/>
                     <a:lstStyle/>
                     <a:p>
-                      <a:pPr indent="0" marL="0">
+                      <a:pPr marL="0" indent="0">
                         <a:buNone/>
                       </a:pPr>
                       <a:r>
@@ -4873,7 +4741,7 @@
                       </a:endParaRPr>
                     </a:p>
                   </a:txBody>
-                  <a:tcPr marL="91440" marR="91440" marT="45720" marB="45720" anchor="ctr">
+                  <a:tcPr anchor="ctr">
                     <a:lnL w="9525" cap="flat" cmpd="sng" algn="ctr">
                       <a:solidFill>
                         <a:srgbClr val="DCE4EE"/>
@@ -4920,7 +4788,7 @@
                     <a:bodyPr/>
                     <a:lstStyle/>
                     <a:p>
-                      <a:pPr indent="0" marL="0">
+                      <a:pPr marL="0" indent="0">
                         <a:buNone/>
                       </a:pPr>
                       <a:r>
@@ -4941,7 +4809,7 @@
                       </a:endParaRPr>
                     </a:p>
                   </a:txBody>
-                  <a:tcPr marL="91440" marR="91440" marT="45720" marB="45720" anchor="ctr">
+                  <a:tcPr anchor="ctr">
                     <a:lnL w="9525" cap="flat" cmpd="sng" algn="ctr">
                       <a:solidFill>
                         <a:srgbClr val="DCE4EE"/>
@@ -4988,7 +4856,7 @@
                     <a:bodyPr/>
                     <a:lstStyle/>
                     <a:p>
-                      <a:pPr indent="0" marL="0">
+                      <a:pPr marL="0" indent="0">
                         <a:buNone/>
                       </a:pPr>
                       <a:r>
@@ -5009,7 +4877,7 @@
                       </a:endParaRPr>
                     </a:p>
                   </a:txBody>
-                  <a:tcPr marL="91440" marR="91440" marT="45720" marB="45720" anchor="ctr">
+                  <a:tcPr anchor="ctr">
                     <a:lnL w="9525" cap="flat" cmpd="sng" algn="ctr">
                       <a:solidFill>
                         <a:srgbClr val="DCE4EE"/>
@@ -5051,6 +4919,11 @@
                     </a:solidFill>
                   </a:tcPr>
                 </a:tc>
+                <a:extLst>
+                  <a:ext uri="{0D108BD9-81ED-4DB2-BD59-A6C34878D82A}">
+                    <a16:rowId xmlns:a16="http://schemas.microsoft.com/office/drawing/2014/main" val="10006"/>
+                  </a:ext>
+                </a:extLst>
               </a:tr>
               <a:tr h="384048">
                 <a:tc>
@@ -5058,7 +4931,7 @@
                     <a:bodyPr/>
                     <a:lstStyle/>
                     <a:p>
-                      <a:pPr indent="0" marL="0">
+                      <a:pPr marL="0" indent="0">
                         <a:buNone/>
                       </a:pPr>
                       <a:r>
@@ -5079,7 +4952,7 @@
                       </a:endParaRPr>
                     </a:p>
                   </a:txBody>
-                  <a:tcPr marL="91440" marR="91440" marT="45720" marB="45720" anchor="ctr">
+                  <a:tcPr anchor="ctr">
                     <a:lnL w="9525" cap="flat" cmpd="sng" algn="ctr">
                       <a:solidFill>
                         <a:srgbClr val="DCE4EE"/>
@@ -5126,7 +4999,7 @@
                     <a:bodyPr/>
                     <a:lstStyle/>
                     <a:p>
-                      <a:pPr indent="0" marL="0">
+                      <a:pPr marL="0" indent="0">
                         <a:buNone/>
                       </a:pPr>
                       <a:r>
@@ -5147,7 +5020,7 @@
                       </a:endParaRPr>
                     </a:p>
                   </a:txBody>
-                  <a:tcPr marL="91440" marR="91440" marT="45720" marB="45720" anchor="ctr">
+                  <a:tcPr anchor="ctr">
                     <a:lnL w="9525" cap="flat" cmpd="sng" algn="ctr">
                       <a:solidFill>
                         <a:srgbClr val="DCE4EE"/>
@@ -5194,7 +5067,7 @@
                     <a:bodyPr/>
                     <a:lstStyle/>
                     <a:p>
-                      <a:pPr indent="0" marL="0">
+                      <a:pPr marL="0" indent="0">
                         <a:buNone/>
                       </a:pPr>
                       <a:r>
@@ -5215,7 +5088,7 @@
                       </a:endParaRPr>
                     </a:p>
                   </a:txBody>
-                  <a:tcPr marL="91440" marR="91440" marT="45720" marB="45720" anchor="ctr">
+                  <a:tcPr anchor="ctr">
                     <a:lnL w="9525" cap="flat" cmpd="sng" algn="ctr">
                       <a:solidFill>
                         <a:srgbClr val="DCE4EE"/>
@@ -5262,7 +5135,7 @@
                     <a:bodyPr/>
                     <a:lstStyle/>
                     <a:p>
-                      <a:pPr indent="0" marL="0">
+                      <a:pPr marL="0" indent="0">
                         <a:buNone/>
                       </a:pPr>
                       <a:r>
@@ -5283,7 +5156,7 @@
                       </a:endParaRPr>
                     </a:p>
                   </a:txBody>
-                  <a:tcPr marL="91440" marR="91440" marT="45720" marB="45720" anchor="ctr">
+                  <a:tcPr anchor="ctr">
                     <a:lnL w="9525" cap="flat" cmpd="sng" algn="ctr">
                       <a:solidFill>
                         <a:srgbClr val="DCE4EE"/>
@@ -5325,6 +5198,11 @@
                     </a:solidFill>
                   </a:tcPr>
                 </a:tc>
+                <a:extLst>
+                  <a:ext uri="{0D108BD9-81ED-4DB2-BD59-A6C34878D82A}">
+                    <a16:rowId xmlns:a16="http://schemas.microsoft.com/office/drawing/2014/main" val="10007"/>
+                  </a:ext>
+                </a:extLst>
               </a:tr>
               <a:tr h="384048">
                 <a:tc>
@@ -5332,7 +5210,7 @@
                     <a:bodyPr/>
                     <a:lstStyle/>
                     <a:p>
-                      <a:pPr indent="0" marL="0">
+                      <a:pPr marL="0" indent="0">
                         <a:buNone/>
                       </a:pPr>
                       <a:r>
@@ -5353,7 +5231,7 @@
                       </a:endParaRPr>
                     </a:p>
                   </a:txBody>
-                  <a:tcPr marL="91440" marR="91440" marT="45720" marB="45720" anchor="ctr">
+                  <a:tcPr anchor="ctr">
                     <a:lnL w="9525" cap="flat" cmpd="sng" algn="ctr">
                       <a:solidFill>
                         <a:srgbClr val="DCE4EE"/>
@@ -5400,7 +5278,7 @@
                     <a:bodyPr/>
                     <a:lstStyle/>
                     <a:p>
-                      <a:pPr indent="0" marL="0">
+                      <a:pPr marL="0" indent="0">
                         <a:buNone/>
                       </a:pPr>
                       <a:r>
@@ -5421,7 +5299,7 @@
                       </a:endParaRPr>
                     </a:p>
                   </a:txBody>
-                  <a:tcPr marL="91440" marR="91440" marT="45720" marB="45720" anchor="ctr">
+                  <a:tcPr anchor="ctr">
                     <a:lnL w="9525" cap="flat" cmpd="sng" algn="ctr">
                       <a:solidFill>
                         <a:srgbClr val="DCE4EE"/>
@@ -5468,7 +5346,7 @@
                     <a:bodyPr/>
                     <a:lstStyle/>
                     <a:p>
-                      <a:pPr indent="0" marL="0">
+                      <a:pPr marL="0" indent="0">
                         <a:buNone/>
                       </a:pPr>
                       <a:r>
@@ -5489,7 +5367,7 @@
                       </a:endParaRPr>
                     </a:p>
                   </a:txBody>
-                  <a:tcPr marL="91440" marR="91440" marT="45720" marB="45720" anchor="ctr">
+                  <a:tcPr anchor="ctr">
                     <a:lnL w="9525" cap="flat" cmpd="sng" algn="ctr">
                       <a:solidFill>
                         <a:srgbClr val="DCE4EE"/>
@@ -5536,7 +5414,7 @@
                     <a:bodyPr/>
                     <a:lstStyle/>
                     <a:p>
-                      <a:pPr indent="0" marL="0">
+                      <a:pPr marL="0" indent="0">
                         <a:buNone/>
                       </a:pPr>
                       <a:r>
@@ -5557,7 +5435,7 @@
                       </a:endParaRPr>
                     </a:p>
                   </a:txBody>
-                  <a:tcPr marL="91440" marR="91440" marT="45720" marB="45720" anchor="ctr">
+                  <a:tcPr anchor="ctr">
                     <a:lnL w="9525" cap="flat" cmpd="sng" algn="ctr">
                       <a:solidFill>
                         <a:srgbClr val="DCE4EE"/>
@@ -5599,6 +5477,11 @@
                     </a:solidFill>
                   </a:tcPr>
                 </a:tc>
+                <a:extLst>
+                  <a:ext uri="{0D108BD9-81ED-4DB2-BD59-A6C34878D82A}">
+                    <a16:rowId xmlns:a16="http://schemas.microsoft.com/office/drawing/2014/main" val="10008"/>
+                  </a:ext>
+                </a:extLst>
               </a:tr>
             </a:tbl>
           </a:graphicData>
@@ -5625,6 +5508,13 @@
           </a:solidFill>
           <a:ln/>
         </p:spPr>
+        <p:txBody>
+          <a:bodyPr/>
+          <a:lstStyle/>
+          <a:p>
+            <a:endParaRPr lang="es-CO"/>
+          </a:p>
+        </p:txBody>
       </p:sp>
       <p:sp>
         <p:nvSpPr>
@@ -5647,7 +5537,7 @@
           <a:bodyPr wrap="square" rtlCol="0" anchor="ctr"/>
           <a:lstStyle/>
           <a:p>
-            <a:pPr indent="0" marL="0">
+            <a:pPr marL="0" indent="0">
               <a:lnSpc>
                 <a:spcPct val="115000"/>
               </a:lnSpc>
@@ -5664,12 +5554,6 @@
               </a:rPr>
               <a:t>Técnica principal: </a:t>
             </a:r>
-            <a:pPr indent="0" marL="0">
-              <a:lnSpc>
-                <a:spcPct val="115000"/>
-              </a:lnSpc>
-              <a:buNone/>
-            </a:pPr>
             <a:r>
               <a:rPr lang="en-US" sz="1250" dirty="0">
                 <a:solidFill>
@@ -5706,7 +5590,7 @@
           <a:bodyPr wrap="square" rtlCol="0" anchor="ctr"/>
           <a:lstStyle/>
           <a:p>
-            <a:pPr algn="r" indent="0" marL="0">
+            <a:pPr marL="0" indent="0" algn="r">
               <a:buNone/>
             </a:pPr>
             <a:r>
@@ -5740,6 +5624,7 @@
         <a:solidFill>
           <a:srgbClr val="F4F7FB"/>
         </a:solidFill>
+        <a:effectLst/>
       </p:bgPr>
     </p:bg>
     <p:spTree>
@@ -5777,11 +5662,11 @@
           <a:bodyPr wrap="square" rtlCol="0" anchor="ctr"/>
           <a:lstStyle/>
           <a:p>
-            <a:pPr indent="0" marL="0">
+            <a:pPr marL="0" indent="0">
               <a:buNone/>
             </a:pPr>
             <a:r>
-              <a:rPr lang="en-US" sz="1200" b="1" spc="200" kern="0" dirty="0">
+              <a:rPr lang="en-US" sz="1200" b="1" kern="0" spc="200" dirty="0">
                 <a:solidFill>
                   <a:srgbClr val="3D8DFF"/>
                 </a:solidFill>
@@ -5816,7 +5701,7 @@
           <a:bodyPr wrap="square" rtlCol="0" anchor="ctr"/>
           <a:lstStyle/>
           <a:p>
-            <a:pPr indent="0" marL="0">
+            <a:pPr marL="0" indent="0">
               <a:buNone/>
             </a:pPr>
             <a:r>
@@ -5855,7 +5740,7 @@
           <a:bodyPr wrap="square" rtlCol="0" anchor="ctr"/>
           <a:lstStyle/>
           <a:p>
-            <a:pPr indent="0" marL="0">
+            <a:pPr marL="0" indent="0">
               <a:buNone/>
             </a:pPr>
             <a:r>
@@ -5899,13 +5784,20 @@
             <a:prstDash val="solid"/>
           </a:ln>
           <a:effectLst>
-            <a:outerShdw sx="100000" sy="100000" kx="0" ky="0" algn="bl" rotWithShape="0" blurRad="76200" dist="25400" dir="5400000">
+            <a:outerShdw blurRad="76200" dist="25400" dir="5400000" algn="bl" rotWithShape="0">
               <a:srgbClr val="1B2733">
                 <a:alpha val="10000"/>
               </a:srgbClr>
             </a:outerShdw>
           </a:effectLst>
         </p:spPr>
+        <p:txBody>
+          <a:bodyPr/>
+          <a:lstStyle/>
+          <a:p>
+            <a:endParaRPr lang="es-CO"/>
+          </a:p>
+        </p:txBody>
       </p:sp>
       <p:sp>
         <p:nvSpPr>
@@ -5928,6 +5820,13 @@
           </a:solidFill>
           <a:ln/>
         </p:spPr>
+        <p:txBody>
+          <a:bodyPr/>
+          <a:lstStyle/>
+          <a:p>
+            <a:endParaRPr lang="es-CO"/>
+          </a:p>
+        </p:txBody>
       </p:sp>
       <p:sp>
         <p:nvSpPr>
@@ -5948,6 +5847,13 @@
           </a:solidFill>
           <a:ln/>
         </p:spPr>
+        <p:txBody>
+          <a:bodyPr/>
+          <a:lstStyle/>
+          <a:p>
+            <a:endParaRPr lang="es-CO"/>
+          </a:p>
+        </p:txBody>
       </p:sp>
       <p:sp>
         <p:nvSpPr>
@@ -5970,7 +5876,7 @@
           <a:bodyPr wrap="square" lIns="0" tIns="0" rIns="0" bIns="0" rtlCol="0" anchor="ctr"/>
           <a:lstStyle/>
           <a:p>
-            <a:pPr indent="0" marL="0">
+            <a:pPr marL="0" indent="0">
               <a:buNone/>
             </a:pPr>
             <a:r>
@@ -6009,7 +5915,7 @@
           <a:bodyPr wrap="square" lIns="0" tIns="0" rIns="0" bIns="0" rtlCol="0" anchor="ctr"/>
           <a:lstStyle/>
           <a:p>
-            <a:pPr indent="0" marL="0">
+            <a:pPr marL="0" indent="0">
               <a:lnSpc>
                 <a:spcPct val="108000"/>
               </a:lnSpc>
@@ -6056,13 +5962,20 @@
             <a:prstDash val="solid"/>
           </a:ln>
           <a:effectLst>
-            <a:outerShdw sx="100000" sy="100000" kx="0" ky="0" algn="bl" rotWithShape="0" blurRad="76200" dist="25400" dir="5400000">
+            <a:outerShdw blurRad="76200" dist="25400" dir="5400000" algn="bl" rotWithShape="0">
               <a:srgbClr val="1B2733">
                 <a:alpha val="10000"/>
               </a:srgbClr>
             </a:outerShdw>
           </a:effectLst>
         </p:spPr>
+        <p:txBody>
+          <a:bodyPr/>
+          <a:lstStyle/>
+          <a:p>
+            <a:endParaRPr lang="es-CO"/>
+          </a:p>
+        </p:txBody>
       </p:sp>
       <p:sp>
         <p:nvSpPr>
@@ -6085,6 +5998,13 @@
           </a:solidFill>
           <a:ln/>
         </p:spPr>
+        <p:txBody>
+          <a:bodyPr/>
+          <a:lstStyle/>
+          <a:p>
+            <a:endParaRPr lang="es-CO"/>
+          </a:p>
+        </p:txBody>
       </p:sp>
       <p:sp>
         <p:nvSpPr>
@@ -6105,6 +6025,13 @@
           </a:solidFill>
           <a:ln/>
         </p:spPr>
+        <p:txBody>
+          <a:bodyPr/>
+          <a:lstStyle/>
+          <a:p>
+            <a:endParaRPr lang="es-CO"/>
+          </a:p>
+        </p:txBody>
       </p:sp>
       <p:sp>
         <p:nvSpPr>
@@ -6127,7 +6054,7 @@
           <a:bodyPr wrap="square" lIns="0" tIns="0" rIns="0" bIns="0" rtlCol="0" anchor="ctr"/>
           <a:lstStyle/>
           <a:p>
-            <a:pPr indent="0" marL="0">
+            <a:pPr marL="0" indent="0">
               <a:buNone/>
             </a:pPr>
             <a:r>
@@ -6166,7 +6093,7 @@
           <a:bodyPr wrap="square" lIns="0" tIns="0" rIns="0" bIns="0" rtlCol="0" anchor="ctr"/>
           <a:lstStyle/>
           <a:p>
-            <a:pPr indent="0" marL="0">
+            <a:pPr marL="0" indent="0">
               <a:lnSpc>
                 <a:spcPct val="108000"/>
               </a:lnSpc>
@@ -6184,12 +6111,6 @@
               <a:t>ReentrantLock
 </a:t>
             </a:r>
-            <a:pPr indent="0" marL="0">
-              <a:lnSpc>
-                <a:spcPct val="108000"/>
-              </a:lnSpc>
-              <a:buNone/>
-            </a:pPr>
             <a:r>
               <a:rPr lang="en-US" sz="950" dirty="0">
                 <a:solidFill>
@@ -6231,13 +6152,20 @@
             <a:prstDash val="solid"/>
           </a:ln>
           <a:effectLst>
-            <a:outerShdw sx="100000" sy="100000" kx="0" ky="0" algn="bl" rotWithShape="0" blurRad="76200" dist="25400" dir="5400000">
+            <a:outerShdw blurRad="76200" dist="25400" dir="5400000" algn="bl" rotWithShape="0">
               <a:srgbClr val="1B2733">
                 <a:alpha val="10000"/>
               </a:srgbClr>
             </a:outerShdw>
           </a:effectLst>
         </p:spPr>
+        <p:txBody>
+          <a:bodyPr/>
+          <a:lstStyle/>
+          <a:p>
+            <a:endParaRPr lang="es-CO"/>
+          </a:p>
+        </p:txBody>
       </p:sp>
       <p:sp>
         <p:nvSpPr>
@@ -6260,6 +6188,13 @@
           </a:solidFill>
           <a:ln/>
         </p:spPr>
+        <p:txBody>
+          <a:bodyPr/>
+          <a:lstStyle/>
+          <a:p>
+            <a:endParaRPr lang="es-CO"/>
+          </a:p>
+        </p:txBody>
       </p:sp>
       <p:sp>
         <p:nvSpPr>
@@ -6280,6 +6215,13 @@
           </a:solidFill>
           <a:ln/>
         </p:spPr>
+        <p:txBody>
+          <a:bodyPr/>
+          <a:lstStyle/>
+          <a:p>
+            <a:endParaRPr lang="es-CO"/>
+          </a:p>
+        </p:txBody>
       </p:sp>
       <p:sp>
         <p:nvSpPr>
@@ -6302,7 +6244,7 @@
           <a:bodyPr wrap="square" lIns="0" tIns="0" rIns="0" bIns="0" rtlCol="0" anchor="ctr"/>
           <a:lstStyle/>
           <a:p>
-            <a:pPr indent="0" marL="0">
+            <a:pPr marL="0" indent="0">
               <a:buNone/>
             </a:pPr>
             <a:r>
@@ -6341,7 +6283,7 @@
           <a:bodyPr wrap="square" lIns="0" tIns="0" rIns="0" bIns="0" rtlCol="0" anchor="ctr"/>
           <a:lstStyle/>
           <a:p>
-            <a:pPr indent="0" marL="0">
+            <a:pPr marL="0" indent="0">
               <a:lnSpc>
                 <a:spcPct val="108000"/>
               </a:lnSpc>
@@ -6388,13 +6330,20 @@
             <a:prstDash val="solid"/>
           </a:ln>
           <a:effectLst>
-            <a:outerShdw sx="100000" sy="100000" kx="0" ky="0" algn="bl" rotWithShape="0" blurRad="76200" dist="25400" dir="5400000">
+            <a:outerShdw blurRad="76200" dist="25400" dir="5400000" algn="bl" rotWithShape="0">
               <a:srgbClr val="1B2733">
                 <a:alpha val="10000"/>
               </a:srgbClr>
             </a:outerShdw>
           </a:effectLst>
         </p:spPr>
+        <p:txBody>
+          <a:bodyPr/>
+          <a:lstStyle/>
+          <a:p>
+            <a:endParaRPr lang="es-CO"/>
+          </a:p>
+        </p:txBody>
       </p:sp>
       <p:sp>
         <p:nvSpPr>
@@ -6417,6 +6366,13 @@
           </a:solidFill>
           <a:ln/>
         </p:spPr>
+        <p:txBody>
+          <a:bodyPr/>
+          <a:lstStyle/>
+          <a:p>
+            <a:endParaRPr lang="es-CO"/>
+          </a:p>
+        </p:txBody>
       </p:sp>
       <p:sp>
         <p:nvSpPr>
@@ -6437,6 +6393,13 @@
           </a:solidFill>
           <a:ln/>
         </p:spPr>
+        <p:txBody>
+          <a:bodyPr/>
+          <a:lstStyle/>
+          <a:p>
+            <a:endParaRPr lang="es-CO"/>
+          </a:p>
+        </p:txBody>
       </p:sp>
       <p:sp>
         <p:nvSpPr>
@@ -6459,7 +6422,7 @@
           <a:bodyPr wrap="square" lIns="0" tIns="0" rIns="0" bIns="0" rtlCol="0" anchor="ctr"/>
           <a:lstStyle/>
           <a:p>
-            <a:pPr indent="0" marL="0">
+            <a:pPr marL="0" indent="0">
               <a:buNone/>
             </a:pPr>
             <a:r>
@@ -6498,7 +6461,7 @@
           <a:bodyPr wrap="square" lIns="0" tIns="0" rIns="0" bIns="0" rtlCol="0" anchor="ctr"/>
           <a:lstStyle/>
           <a:p>
-            <a:pPr indent="0" marL="0">
+            <a:pPr marL="0" indent="0">
               <a:lnSpc>
                 <a:spcPct val="108000"/>
               </a:lnSpc>
@@ -6542,6 +6505,13 @@
             <a:tailEnd type="triangle"/>
           </a:ln>
         </p:spPr>
+        <p:txBody>
+          <a:bodyPr/>
+          <a:lstStyle/>
+          <a:p>
+            <a:endParaRPr lang="es-CO"/>
+          </a:p>
+        </p:txBody>
       </p:sp>
       <p:sp>
         <p:nvSpPr>
@@ -6566,6 +6536,13 @@
             <a:tailEnd type="triangle"/>
           </a:ln>
         </p:spPr>
+        <p:txBody>
+          <a:bodyPr/>
+          <a:lstStyle/>
+          <a:p>
+            <a:endParaRPr lang="es-CO"/>
+          </a:p>
+        </p:txBody>
       </p:sp>
       <p:sp>
         <p:nvSpPr>
@@ -6590,6 +6567,13 @@
             <a:tailEnd type="triangle"/>
           </a:ln>
         </p:spPr>
+        <p:txBody>
+          <a:bodyPr/>
+          <a:lstStyle/>
+          <a:p>
+            <a:endParaRPr lang="es-CO"/>
+          </a:p>
+        </p:txBody>
       </p:sp>
       <p:sp>
         <p:nvSpPr>
@@ -6612,7 +6596,7 @@
           <a:bodyPr wrap="square" lIns="0" tIns="0" rIns="0" bIns="0" rtlCol="0" anchor="ctr"/>
           <a:lstStyle/>
           <a:p>
-            <a:pPr indent="0" marL="0">
+            <a:pPr marL="0" indent="0">
               <a:buNone/>
             </a:pPr>
             <a:r>
@@ -6651,7 +6635,7 @@
           <a:bodyPr wrap="square" lIns="0" tIns="0" rIns="0" bIns="0" rtlCol="0" anchor="ctr"/>
           <a:lstStyle/>
           <a:p>
-            <a:pPr indent="0" marL="0">
+            <a:pPr marL="0" indent="0">
               <a:buNone/>
             </a:pPr>
             <a:r>
@@ -6690,7 +6674,7 @@
           <a:bodyPr wrap="square" lIns="0" tIns="0" rIns="0" bIns="0" rtlCol="0" anchor="ctr"/>
           <a:lstStyle/>
           <a:p>
-            <a:pPr indent="0" marL="0">
+            <a:pPr marL="0" indent="0">
               <a:buNone/>
             </a:pPr>
             <a:r>
@@ -6734,6 +6718,13 @@
             <a:prstDash val="solid"/>
           </a:ln>
         </p:spPr>
+        <p:txBody>
+          <a:bodyPr/>
+          <a:lstStyle/>
+          <a:p>
+            <a:endParaRPr lang="es-CO"/>
+          </a:p>
+        </p:txBody>
       </p:sp>
       <p:sp>
         <p:nvSpPr>
@@ -6756,7 +6747,7 @@
           <a:bodyPr wrap="square" lIns="0" tIns="0" rIns="0" bIns="0" rtlCol="0" anchor="ctr"/>
           <a:lstStyle/>
           <a:p>
-            <a:pPr indent="0" marL="0">
+            <a:pPr marL="0" indent="0">
               <a:buNone/>
             </a:pPr>
             <a:r>
@@ -6800,13 +6791,20 @@
             <a:prstDash val="solid"/>
           </a:ln>
           <a:effectLst>
-            <a:outerShdw sx="100000" sy="100000" kx="0" ky="0" algn="bl" rotWithShape="0" blurRad="76200" dist="25400" dir="5400000">
+            <a:outerShdw blurRad="76200" dist="25400" dir="5400000" algn="bl" rotWithShape="0">
               <a:srgbClr val="1B2733">
                 <a:alpha val="10000"/>
               </a:srgbClr>
             </a:outerShdw>
           </a:effectLst>
         </p:spPr>
+        <p:txBody>
+          <a:bodyPr/>
+          <a:lstStyle/>
+          <a:p>
+            <a:endParaRPr lang="es-CO"/>
+          </a:p>
+        </p:txBody>
       </p:sp>
       <p:sp>
         <p:nvSpPr>
@@ -6827,6 +6825,13 @@
           </a:solidFill>
           <a:ln/>
         </p:spPr>
+        <p:txBody>
+          <a:bodyPr/>
+          <a:lstStyle/>
+          <a:p>
+            <a:endParaRPr lang="es-CO"/>
+          </a:p>
+        </p:txBody>
       </p:sp>
       <p:sp>
         <p:nvSpPr>
@@ -6849,7 +6854,7 @@
           <a:bodyPr wrap="square" lIns="0" tIns="0" rIns="0" bIns="0" rtlCol="0" anchor="ctr"/>
           <a:lstStyle/>
           <a:p>
-            <a:pPr indent="0" marL="0">
+            <a:pPr marL="0" indent="0">
               <a:buNone/>
             </a:pPr>
             <a:r>
@@ -6888,7 +6893,7 @@
           <a:bodyPr wrap="square" lIns="0" tIns="0" rIns="0" bIns="0" rtlCol="0" anchor="ctr"/>
           <a:lstStyle/>
           <a:p>
-            <a:pPr indent="0" marL="0">
+            <a:pPr marL="0" indent="0">
               <a:lnSpc>
                 <a:spcPct val="115000"/>
               </a:lnSpc>
@@ -6935,13 +6940,20 @@
             <a:prstDash val="solid"/>
           </a:ln>
           <a:effectLst>
-            <a:outerShdw sx="100000" sy="100000" kx="0" ky="0" algn="bl" rotWithShape="0" blurRad="76200" dist="25400" dir="5400000">
+            <a:outerShdw blurRad="76200" dist="25400" dir="5400000" algn="bl" rotWithShape="0">
               <a:srgbClr val="1B2733">
                 <a:alpha val="10000"/>
               </a:srgbClr>
             </a:outerShdw>
           </a:effectLst>
         </p:spPr>
+        <p:txBody>
+          <a:bodyPr/>
+          <a:lstStyle/>
+          <a:p>
+            <a:endParaRPr lang="es-CO"/>
+          </a:p>
+        </p:txBody>
       </p:sp>
       <p:sp>
         <p:nvSpPr>
@@ -6962,6 +6974,13 @@
           </a:solidFill>
           <a:ln/>
         </p:spPr>
+        <p:txBody>
+          <a:bodyPr/>
+          <a:lstStyle/>
+          <a:p>
+            <a:endParaRPr lang="es-CO"/>
+          </a:p>
+        </p:txBody>
       </p:sp>
       <p:sp>
         <p:nvSpPr>
@@ -6984,7 +7003,7 @@
           <a:bodyPr wrap="square" lIns="0" tIns="0" rIns="0" bIns="0" rtlCol="0" anchor="ctr"/>
           <a:lstStyle/>
           <a:p>
-            <a:pPr indent="0" marL="0">
+            <a:pPr marL="0" indent="0">
               <a:buNone/>
             </a:pPr>
             <a:r>
@@ -7023,7 +7042,7 @@
           <a:bodyPr wrap="square" lIns="0" tIns="0" rIns="0" bIns="0" rtlCol="0" anchor="ctr"/>
           <a:lstStyle/>
           <a:p>
-            <a:pPr indent="0" marL="0">
+            <a:pPr marL="0" indent="0">
               <a:lnSpc>
                 <a:spcPct val="115000"/>
               </a:lnSpc>
@@ -7070,13 +7089,20 @@
             <a:prstDash val="solid"/>
           </a:ln>
           <a:effectLst>
-            <a:outerShdw sx="100000" sy="100000" kx="0" ky="0" algn="bl" rotWithShape="0" blurRad="76200" dist="25400" dir="5400000">
+            <a:outerShdw blurRad="76200" dist="25400" dir="5400000" algn="bl" rotWithShape="0">
               <a:srgbClr val="1B2733">
                 <a:alpha val="10000"/>
               </a:srgbClr>
             </a:outerShdw>
           </a:effectLst>
         </p:spPr>
+        <p:txBody>
+          <a:bodyPr/>
+          <a:lstStyle/>
+          <a:p>
+            <a:endParaRPr lang="es-CO"/>
+          </a:p>
+        </p:txBody>
       </p:sp>
       <p:sp>
         <p:nvSpPr>
@@ -7097,6 +7123,13 @@
           </a:solidFill>
           <a:ln/>
         </p:spPr>
+        <p:txBody>
+          <a:bodyPr/>
+          <a:lstStyle/>
+          <a:p>
+            <a:endParaRPr lang="es-CO"/>
+          </a:p>
+        </p:txBody>
       </p:sp>
       <p:sp>
         <p:nvSpPr>
@@ -7119,7 +7152,7 @@
           <a:bodyPr wrap="square" lIns="0" tIns="0" rIns="0" bIns="0" rtlCol="0" anchor="ctr"/>
           <a:lstStyle/>
           <a:p>
-            <a:pPr indent="0" marL="0">
+            <a:pPr marL="0" indent="0">
               <a:buNone/>
             </a:pPr>
             <a:r>
@@ -7158,7 +7191,7 @@
           <a:bodyPr wrap="square" lIns="0" tIns="0" rIns="0" bIns="0" rtlCol="0" anchor="ctr"/>
           <a:lstStyle/>
           <a:p>
-            <a:pPr indent="0" marL="0">
+            <a:pPr marL="0" indent="0">
               <a:lnSpc>
                 <a:spcPct val="115000"/>
               </a:lnSpc>
@@ -7200,7 +7233,7 @@
           <a:bodyPr wrap="square" rtlCol="0" anchor="ctr"/>
           <a:lstStyle/>
           <a:p>
-            <a:pPr algn="r" indent="0" marL="0">
+            <a:pPr marL="0" indent="0" algn="r">
               <a:buNone/>
             </a:pPr>
             <a:r>
@@ -7519,4 +7552,319 @@
     </a:ext>
   </a:extLst>
 </a:theme>
+</file>
+
+<file path=ppt/theme/theme2.xml><?xml version="1.0" encoding="utf-8"?>
+<a:theme xmlns:a="http://schemas.openxmlformats.org/drawingml/2006/main" name="Tema de Office">
+  <a:themeElements>
+    <a:clrScheme name="Office">
+      <a:dk1>
+        <a:sysClr val="windowText" lastClr="000000"/>
+      </a:dk1>
+      <a:lt1>
+        <a:sysClr val="window" lastClr="FFFFFF"/>
+      </a:lt1>
+      <a:dk2>
+        <a:srgbClr val="0E2841"/>
+      </a:dk2>
+      <a:lt2>
+        <a:srgbClr val="E8E8E8"/>
+      </a:lt2>
+      <a:accent1>
+        <a:srgbClr val="156082"/>
+      </a:accent1>
+      <a:accent2>
+        <a:srgbClr val="E97132"/>
+      </a:accent2>
+      <a:accent3>
+        <a:srgbClr val="196B24"/>
+      </a:accent3>
+      <a:accent4>
+        <a:srgbClr val="0F9ED5"/>
+      </a:accent4>
+      <a:accent5>
+        <a:srgbClr val="A02B93"/>
+      </a:accent5>
+      <a:accent6>
+        <a:srgbClr val="4EA72E"/>
+      </a:accent6>
+      <a:hlink>
+        <a:srgbClr val="467886"/>
+      </a:hlink>
+      <a:folHlink>
+        <a:srgbClr val="96607D"/>
+      </a:folHlink>
+    </a:clrScheme>
+    <a:fontScheme name="Office">
+      <a:majorFont>
+        <a:latin typeface="Aptos Display" panose="02110004020202020204"/>
+        <a:ea typeface=""/>
+        <a:cs typeface=""/>
+        <a:font script="Jpan" typeface="游ゴシック Light"/>
+        <a:font script="Hang" typeface="맑은 고딕"/>
+        <a:font script="Hans" typeface="等线 Light"/>
+        <a:font script="Hant" typeface="新細明體"/>
+        <a:font script="Arab" typeface="Times New Roman"/>
+        <a:font script="Hebr" typeface="Times New Roman"/>
+        <a:font script="Thai" typeface="Angsana New"/>
+        <a:font script="Ethi" typeface="Nyala"/>
+        <a:font script="Beng" typeface="Vrinda"/>
+        <a:font script="Gujr" typeface="Shruti"/>
+        <a:font script="Khmr" typeface="MoolBoran"/>
+        <a:font script="Knda" typeface="Tunga"/>
+        <a:font script="Guru" typeface="Raavi"/>
+        <a:font script="Cans" typeface="Euphemia"/>
+        <a:font script="Cher" typeface="Plantagenet Cherokee"/>
+        <a:font script="Yiii" typeface="Microsoft Yi Baiti"/>
+        <a:font script="Tibt" typeface="Microsoft Himalaya"/>
+        <a:font script="Thaa" typeface="MV Boli"/>
+        <a:font script="Deva" typeface="Mangal"/>
+        <a:font script="Telu" typeface="Gautami"/>
+        <a:font script="Taml" typeface="Latha"/>
+        <a:font script="Syrc" typeface="Estrangelo Edessa"/>
+        <a:font script="Orya" typeface="Kalinga"/>
+        <a:font script="Mlym" typeface="Kartika"/>
+        <a:font script="Laoo" typeface="DokChampa"/>
+        <a:font script="Sinh" typeface="Iskoola Pota"/>
+        <a:font script="Mong" typeface="Mongolian Baiti"/>
+        <a:font script="Viet" typeface="Times New Roman"/>
+        <a:font script="Uigh" typeface="Microsoft Uighur"/>
+        <a:font script="Geor" typeface="Sylfaen"/>
+        <a:font script="Armn" typeface="Arial"/>
+        <a:font script="Bugi" typeface="Leelawadee UI"/>
+        <a:font script="Bopo" typeface="Microsoft JhengHei"/>
+        <a:font script="Java" typeface="Javanese Text"/>
+        <a:font script="Lisu" typeface="Segoe UI"/>
+        <a:font script="Mymr" typeface="Myanmar Text"/>
+        <a:font script="Nkoo" typeface="Ebrima"/>
+        <a:font script="Olck" typeface="Nirmala UI"/>
+        <a:font script="Osma" typeface="Ebrima"/>
+        <a:font script="Phag" typeface="Phagspa"/>
+        <a:font script="Syrn" typeface="Estrangelo Edessa"/>
+        <a:font script="Syrj" typeface="Estrangelo Edessa"/>
+        <a:font script="Syre" typeface="Estrangelo Edessa"/>
+        <a:font script="Sora" typeface="Nirmala UI"/>
+        <a:font script="Tale" typeface="Microsoft Tai Le"/>
+        <a:font script="Talu" typeface="Microsoft New Tai Lue"/>
+        <a:font script="Tfng" typeface="Ebrima"/>
+      </a:majorFont>
+      <a:minorFont>
+        <a:latin typeface="Aptos" panose="02110004020202020204"/>
+        <a:ea typeface=""/>
+        <a:cs typeface=""/>
+        <a:font script="Jpan" typeface="游ゴシック"/>
+        <a:font script="Hang" typeface="맑은 고딕"/>
+        <a:font script="Hans" typeface="等线"/>
+        <a:font script="Hant" typeface="新細明體"/>
+        <a:font script="Arab" typeface="Arial"/>
+        <a:font script="Hebr" typeface="Arial"/>
+        <a:font script="Thai" typeface="Cordia New"/>
+        <a:font script="Ethi" typeface="Nyala"/>
+        <a:font script="Beng" typeface="Vrinda"/>
+        <a:font script="Gujr" typeface="Shruti"/>
+        <a:font script="Khmr" typeface="DaunPenh"/>
+        <a:font script="Knda" typeface="Tunga"/>
+        <a:font script="Guru" typeface="Raavi"/>
+        <a:font script="Cans" typeface="Euphemia"/>
+        <a:font script="Cher" typeface="Plantagenet Cherokee"/>
+        <a:font script="Yiii" typeface="Microsoft Yi Baiti"/>
+        <a:font script="Tibt" typeface="Microsoft Himalaya"/>
+        <a:font script="Thaa" typeface="MV Boli"/>
+        <a:font script="Deva" typeface="Mangal"/>
+        <a:font script="Telu" typeface="Gautami"/>
+        <a:font script="Taml" typeface="Latha"/>
+        <a:font script="Syrc" typeface="Estrangelo Edessa"/>
+        <a:font script="Orya" typeface="Kalinga"/>
+        <a:font script="Mlym" typeface="Kartika"/>
+        <a:font script="Laoo" typeface="DokChampa"/>
+        <a:font script="Sinh" typeface="Iskoola Pota"/>
+        <a:font script="Mong" typeface="Mongolian Baiti"/>
+        <a:font script="Viet" typeface="Arial"/>
+        <a:font script="Uigh" typeface="Microsoft Uighur"/>
+        <a:font script="Geor" typeface="Sylfaen"/>
+        <a:font script="Armn" typeface="Arial"/>
+        <a:font script="Bugi" typeface="Leelawadee UI"/>
+        <a:font script="Bopo" typeface="Microsoft JhengHei"/>
+        <a:font script="Java" typeface="Javanese Text"/>
+        <a:font script="Lisu" typeface="Segoe UI"/>
+        <a:font script="Mymr" typeface="Myanmar Text"/>
+        <a:font script="Nkoo" typeface="Ebrima"/>
+        <a:font script="Olck" typeface="Nirmala UI"/>
+        <a:font script="Osma" typeface="Ebrima"/>
+        <a:font script="Phag" typeface="Phagspa"/>
+        <a:font script="Syrn" typeface="Estrangelo Edessa"/>
+        <a:font script="Syrj" typeface="Estrangelo Edessa"/>
+        <a:font script="Syre" typeface="Estrangelo Edessa"/>
+        <a:font script="Sora" typeface="Nirmala UI"/>
+        <a:font script="Tale" typeface="Microsoft Tai Le"/>
+        <a:font script="Talu" typeface="Microsoft New Tai Lue"/>
+        <a:font script="Tfng" typeface="Ebrima"/>
+      </a:minorFont>
+    </a:fontScheme>
+    <a:fmtScheme name="Office">
+      <a:fillStyleLst>
+        <a:solidFill>
+          <a:schemeClr val="phClr"/>
+        </a:solidFill>
+        <a:gradFill rotWithShape="1">
+          <a:gsLst>
+            <a:gs pos="0">
+              <a:schemeClr val="phClr">
+                <a:lumMod val="110000"/>
+                <a:satMod val="105000"/>
+                <a:tint val="67000"/>
+              </a:schemeClr>
+            </a:gs>
+            <a:gs pos="50000">
+              <a:schemeClr val="phClr">
+                <a:lumMod val="105000"/>
+                <a:satMod val="103000"/>
+                <a:tint val="73000"/>
+              </a:schemeClr>
+            </a:gs>
+            <a:gs pos="100000">
+              <a:schemeClr val="phClr">
+                <a:lumMod val="105000"/>
+                <a:satMod val="109000"/>
+                <a:tint val="81000"/>
+              </a:schemeClr>
+            </a:gs>
+          </a:gsLst>
+          <a:lin ang="5400000" scaled="0"/>
+        </a:gradFill>
+        <a:gradFill rotWithShape="1">
+          <a:gsLst>
+            <a:gs pos="0">
+              <a:schemeClr val="phClr">
+                <a:satMod val="103000"/>
+                <a:lumMod val="102000"/>
+                <a:tint val="94000"/>
+              </a:schemeClr>
+            </a:gs>
+            <a:gs pos="50000">
+              <a:schemeClr val="phClr">
+                <a:satMod val="110000"/>
+                <a:lumMod val="100000"/>
+                <a:shade val="100000"/>
+              </a:schemeClr>
+            </a:gs>
+            <a:gs pos="100000">
+              <a:schemeClr val="phClr">
+                <a:lumMod val="99000"/>
+                <a:satMod val="120000"/>
+                <a:shade val="78000"/>
+              </a:schemeClr>
+            </a:gs>
+          </a:gsLst>
+          <a:lin ang="5400000" scaled="0"/>
+        </a:gradFill>
+      </a:fillStyleLst>
+      <a:lnStyleLst>
+        <a:ln w="12700" cap="flat" cmpd="sng" algn="ctr">
+          <a:solidFill>
+            <a:schemeClr val="phClr"/>
+          </a:solidFill>
+          <a:prstDash val="solid"/>
+          <a:miter lim="800000"/>
+        </a:ln>
+        <a:ln w="19050" cap="flat" cmpd="sng" algn="ctr">
+          <a:solidFill>
+            <a:schemeClr val="phClr"/>
+          </a:solidFill>
+          <a:prstDash val="solid"/>
+          <a:miter lim="800000"/>
+        </a:ln>
+        <a:ln w="25400" cap="flat" cmpd="sng" algn="ctr">
+          <a:solidFill>
+            <a:schemeClr val="phClr"/>
+          </a:solidFill>
+          <a:prstDash val="solid"/>
+          <a:miter lim="800000"/>
+        </a:ln>
+      </a:lnStyleLst>
+      <a:effectStyleLst>
+        <a:effectStyle>
+          <a:effectLst/>
+        </a:effectStyle>
+        <a:effectStyle>
+          <a:effectLst/>
+        </a:effectStyle>
+        <a:effectStyle>
+          <a:effectLst>
+            <a:outerShdw blurRad="57150" dist="19050" dir="5400000" algn="ctr" rotWithShape="0">
+              <a:srgbClr val="000000">
+                <a:alpha val="63000"/>
+              </a:srgbClr>
+            </a:outerShdw>
+          </a:effectLst>
+        </a:effectStyle>
+      </a:effectStyleLst>
+      <a:bgFillStyleLst>
+        <a:solidFill>
+          <a:schemeClr val="phClr"/>
+        </a:solidFill>
+        <a:solidFill>
+          <a:schemeClr val="phClr">
+            <a:tint val="95000"/>
+            <a:satMod val="170000"/>
+          </a:schemeClr>
+        </a:solidFill>
+        <a:gradFill rotWithShape="1">
+          <a:gsLst>
+            <a:gs pos="0">
+              <a:schemeClr val="phClr">
+                <a:tint val="93000"/>
+                <a:satMod val="150000"/>
+                <a:shade val="98000"/>
+                <a:lumMod val="102000"/>
+              </a:schemeClr>
+            </a:gs>
+            <a:gs pos="50000">
+              <a:schemeClr val="phClr">
+                <a:tint val="98000"/>
+                <a:satMod val="130000"/>
+                <a:shade val="90000"/>
+                <a:lumMod val="103000"/>
+              </a:schemeClr>
+            </a:gs>
+            <a:gs pos="100000">
+              <a:schemeClr val="phClr">
+                <a:shade val="63000"/>
+                <a:satMod val="120000"/>
+              </a:schemeClr>
+            </a:gs>
+          </a:gsLst>
+          <a:lin ang="5400000" scaled="0"/>
+        </a:gradFill>
+      </a:bgFillStyleLst>
+    </a:fmtScheme>
+  </a:themeElements>
+  <a:objectDefaults>
+    <a:lnDef>
+      <a:spPr/>
+      <a:bodyPr/>
+      <a:lstStyle/>
+      <a:style>
+        <a:lnRef idx="2">
+          <a:schemeClr val="accent1"/>
+        </a:lnRef>
+        <a:fillRef idx="0">
+          <a:schemeClr val="accent1"/>
+        </a:fillRef>
+        <a:effectRef idx="1">
+          <a:schemeClr val="accent1"/>
+        </a:effectRef>
+        <a:fontRef idx="minor">
+          <a:schemeClr val="tx1"/>
+        </a:fontRef>
+      </a:style>
+    </a:lnDef>
+  </a:objectDefaults>
+  <a:extraClrSchemeLst/>
+  <a:extLst>
+    <a:ext uri="{05A4C25C-085E-4340-85A3-A5531E510DB2}">
+      <thm15:themeFamily xmlns:thm15="http://schemas.microsoft.com/office/thememl/2012/main" name="Office Theme" id="{2E142A2C-CD16-42D6-873A-C26D2A0506FA}" vid="{1BDDFF52-6CD6-40A5-AB3C-68EB2F1E4D0A}"/>
+    </a:ext>
+  </a:extLst>
+</a:theme>
 </file>